--- a/portfolio/risk-copilot-deck-tight.pptx
+++ b/portfolio/risk-copilot-deck-tight.pptx
@@ -21,9 +21,10 @@
     <p:sldId id="269" r:id="rId15"/>
     <p:sldId id="270" r:id="rId16"/>
     <p:sldId id="271" r:id="rId17"/>
+    <p:sldId id="272" r:id="rId18"/>
   </p:sldIdLst>
   <p:notesMasterIdLst>
-    <p:notesMasterId r:id="rId18"/>
+    <p:notesMasterId r:id="rId19"/>
   </p:notesMasterIdLst>
   <p:sldSz cx="12192000" cy="6858000"/>
   <p:notesSz cx="6858000" cy="12192000"/>
@@ -1157,6 +1158,94 @@
             <a:fld id="{F7021451-1387-4CA6-816F-3879F97B5CBC}" type="slidenum">
               <a:rPr lang="en-US"/>
               <a:t>16</a:t>
+            </a:fld>
+            <a:endParaRPr lang="en-US"/>
+          </a:p>
+        </p:txBody>
+      </p:sp>
+    </p:spTree>
+    <p:extLst>
+      <p:ext uri="{BB962C8B-B14F-4D97-AF65-F5344CB8AC3E}">
+        <p14:creationId xmlns:p14="http://schemas.microsoft.com/office/powerpoint/2010/main" val="1024086991"/>
+      </p:ext>
+    </p:extLst>
+  </p:cSld>
+  <p:clrMapOvr>
+    <a:masterClrMapping/>
+  </p:clrMapOvr>
+</p:notes>
+</file>
+
+<file path=ppt/notesSlides/notesSlide17.xml><?xml version="1.0" encoding="utf-8"?>
+<p:notes xmlns:a="http://schemas.openxmlformats.org/drawingml/2006/main" xmlns:r="http://schemas.openxmlformats.org/officeDocument/2006/relationships" xmlns:p="http://schemas.openxmlformats.org/presentationml/2006/main">
+  <p:cSld>
+    <p:spTree>
+      <p:nvGrpSpPr>
+        <p:cNvPr id="1" name=""/>
+        <p:cNvGrpSpPr/>
+        <p:nvPr/>
+      </p:nvGrpSpPr>
+      <p:grpSpPr>
+        <a:xfrm>
+          <a:off x="0" y="0"/>
+          <a:ext cx="0" cy="0"/>
+          <a:chOff x="0" y="0"/>
+          <a:chExt cx="0" cy="0"/>
+        </a:xfrm>
+      </p:grpSpPr>
+      <p:sp>
+        <p:nvSpPr>
+          <p:cNvPr id="2" name="Slide Image Placeholder 1"/>
+          <p:cNvSpPr>
+            <a:spLocks noGrp="1" noRot="1" noChangeAspect="1"/>
+          </p:cNvSpPr>
+          <p:nvPr>
+            <p:ph type="sldImg"/>
+          </p:nvPr>
+        </p:nvSpPr>
+        <p:spPr/>
+      </p:sp>
+      <p:sp>
+        <p:nvSpPr>
+          <p:cNvPr id="3" name="Notes Placeholder 2"/>
+          <p:cNvSpPr>
+            <a:spLocks noGrp="1"/>
+          </p:cNvSpPr>
+          <p:nvPr>
+            <p:ph type="body" idx="1"/>
+          </p:nvPr>
+        </p:nvSpPr>
+        <p:spPr/>
+        <p:txBody>
+          <a:bodyPr/>
+          <a:lstStyle/>
+          <a:p>
+            <a:r>
+              <a:rPr lang="en-US" dirty="0"/>
+              <a:t/>
+            </a:r>
+            <a:endParaRPr lang="en-US" dirty="0"/>
+          </a:p>
+        </p:txBody>
+      </p:sp>
+      <p:sp>
+        <p:nvSpPr>
+          <p:cNvPr id="4" name="Slide Number Placeholder 3"/>
+          <p:cNvSpPr>
+            <a:spLocks noGrp="1"/>
+          </p:cNvSpPr>
+          <p:nvPr>
+            <p:ph type="sldNum" sz="quarter" idx="10"/>
+          </p:nvPr>
+        </p:nvSpPr>
+        <p:spPr/>
+        <p:txBody>
+          <a:bodyPr/>
+          <a:lstStyle/>
+          <a:p>
+            <a:fld id="{F7021451-1387-4CA6-816F-3879F97B5CBC}" type="slidenum">
+              <a:rPr lang="en-US"/>
+              <a:t>17</a:t>
             </a:fld>
             <a:endParaRPr lang="en-US"/>
           </a:p>
@@ -3031,7 +3120,7 @@
                 <a:ea typeface="Courier New" pitchFamily="34" charset="-122"/>
                 <a:cs typeface="Courier New" pitchFamily="34" charset="-120"/>
               </a:rPr>
-              <a:t>10 / 16</a:t>
+              <a:t>10 / 17</a:t>
             </a:r>
             <a:endParaRPr lang="en-US" sz="900" dirty="0"/>
           </a:p>
@@ -3102,7 +3191,7 @@
                 <a:ea typeface="Courier New" pitchFamily="34" charset="-122"/>
                 <a:cs typeface="Courier New" pitchFamily="34" charset="-120"/>
               </a:rPr>
-              <a:t>DEEP DIVE</a:t>
+              <a:t>PROOF</a:t>
             </a:r>
             <a:endParaRPr lang="en-US" sz="1000" dirty="0"/>
           </a:p>
@@ -3141,7 +3230,7 @@
                 <a:ea typeface="Arial" pitchFamily="34" charset="-122"/>
                 <a:cs typeface="Arial" pitchFamily="34" charset="-120"/>
               </a:rPr>
-              <a:t>Governance is the packaging, not the fine print</a:t>
+              <a:t>Same app. Same backend. Two rails.</a:t>
             </a:r>
             <a:endParaRPr lang="en-US" sz="3000" dirty="0"/>
           </a:p>
@@ -3155,12 +3244,12 @@
         </p:nvSpPr>
         <p:spPr>
           <a:xfrm>
-            <a:off x="566928" y="1856232"/>
-            <a:ext cx="5070348" cy="3291840"/>
+            <a:off x="566928" y="1444752"/>
+            <a:ext cx="5390388" cy="4270248"/>
           </a:xfrm>
           <a:prstGeom prst="roundRect">
             <a:avLst>
-              <a:gd name="adj" fmla="val 1667"/>
+              <a:gd name="adj" fmla="val 1285"/>
             </a:avLst>
           </a:prstGeom>
           <a:solidFill>
@@ -3182,8 +3271,8 @@
         </p:nvSpPr>
         <p:spPr>
           <a:xfrm>
-            <a:off x="841248" y="2057400"/>
-            <a:ext cx="4521708" cy="365760"/>
+            <a:off x="804672" y="1591056"/>
+            <a:ext cx="2921508" cy="292608"/>
           </a:xfrm>
           <a:prstGeom prst="rect">
             <a:avLst/>
@@ -3199,7 +3288,7 @@
               <a:buNone/>
             </a:pPr>
             <a:r>
-              <a:rPr lang="en-US" sz="2000" b="1" dirty="0">
+              <a:rPr lang="en-US" sz="1600" b="1" dirty="0">
                 <a:solidFill>
                   <a:srgbClr val="E7ECF3"/>
                 </a:solidFill>
@@ -3209,7 +3298,7 @@
               </a:rPr>
               <a:t>Analyst</a:t>
             </a:r>
-            <a:endParaRPr lang="en-US" sz="2000" dirty="0"/>
+            <a:endParaRPr lang="en-US" sz="1600" dirty="0"/>
           </a:p>
         </p:txBody>
       </p:sp>
@@ -3221,8 +3310,8 @@
         </p:nvSpPr>
         <p:spPr>
           <a:xfrm>
-            <a:off x="841248" y="2459736"/>
-            <a:ext cx="4521708" cy="274320"/>
+            <a:off x="3488436" y="1600200"/>
+            <a:ext cx="2231136" cy="274320"/>
           </a:xfrm>
           <a:prstGeom prst="rect">
             <a:avLst/>
@@ -3234,50 +3323,153 @@
           <a:bodyPr wrap="square" lIns="0" tIns="0" rIns="0" bIns="0" rtlCol="0" anchor="ctr"/>
           <a:lstStyle/>
           <a:p>
+            <a:pPr algn="r" indent="0" marL="0">
+              <a:buNone/>
+            </a:pPr>
+            <a:r>
+              <a:rPr lang="en-US" sz="850" dirty="0">
+                <a:solidFill>
+                  <a:srgbClr val="3FC9BD"/>
+                </a:solidFill>
+                <a:latin typeface="Courier New" pitchFamily="34" charset="0"/>
+                <a:ea typeface="Courier New" pitchFamily="34" charset="-122"/>
+                <a:cs typeface="Courier New" pitchFamily="34" charset="-120"/>
+              </a:rPr>
+              <a:t>CSAM VM PC WAS TC CS PM CA</a:t>
+            </a:r>
+            <a:endParaRPr lang="en-US" sz="850" dirty="0"/>
+          </a:p>
+        </p:txBody>
+      </p:sp>
+      <p:sp>
+        <p:nvSpPr>
+          <p:cNvPr id="7" name="Shape 5"/>
+          <p:cNvSpPr/>
+          <p:nvPr/>
+        </p:nvSpPr>
+        <p:spPr>
+          <a:xfrm>
+            <a:off x="804672" y="2039112"/>
+            <a:ext cx="182880" cy="182880"/>
+          </a:xfrm>
+          <a:prstGeom prst="ellipse">
+            <a:avLst/>
+          </a:prstGeom>
+          <a:solidFill>
+            <a:srgbClr val="2A3341"/>
+          </a:solidFill>
+          <a:ln w="12700">
+            <a:solidFill>
+              <a:srgbClr val="333333"/>
+            </a:solidFill>
+            <a:prstDash val="solid"/>
+          </a:ln>
+        </p:spPr>
+      </p:sp>
+      <p:sp>
+        <p:nvSpPr>
+          <p:cNvPr id="8" name="Text 6"/>
+          <p:cNvSpPr/>
+          <p:nvPr/>
+        </p:nvSpPr>
+        <p:spPr>
+          <a:xfrm>
+            <a:off x="804672" y="2039112"/>
+            <a:ext cx="182880" cy="182880"/>
+          </a:xfrm>
+          <a:prstGeom prst="rect">
+            <a:avLst/>
+          </a:prstGeom>
+          <a:noFill/>
+          <a:ln/>
+        </p:spPr>
+        <p:txBody>
+          <a:bodyPr wrap="square" lIns="0" tIns="0" rIns="0" bIns="0" rtlCol="0" anchor="ctr"/>
+          <a:lstStyle/>
+          <a:p>
+            <a:pPr algn="ctr" indent="0" marL="0">
+              <a:buNone/>
+            </a:pPr>
+            <a:r>
+              <a:rPr lang="en-US" sz="750" dirty="0">
+                <a:solidFill>
+                  <a:srgbClr val="A3ADC0"/>
+                </a:solidFill>
+                <a:latin typeface="Courier New" pitchFamily="34" charset="0"/>
+                <a:ea typeface="Courier New" pitchFamily="34" charset="-122"/>
+                <a:cs typeface="Courier New" pitchFamily="34" charset="-120"/>
+              </a:rPr>
+              <a:t>1</a:t>
+            </a:r>
+            <a:endParaRPr lang="en-US" sz="750" dirty="0"/>
+          </a:p>
+        </p:txBody>
+      </p:sp>
+      <p:sp>
+        <p:nvSpPr>
+          <p:cNvPr id="9" name="Text 7"/>
+          <p:cNvSpPr/>
+          <p:nvPr/>
+        </p:nvSpPr>
+        <p:spPr>
+          <a:xfrm>
+            <a:off x="1060704" y="2011680"/>
+            <a:ext cx="4640580" cy="228600"/>
+          </a:xfrm>
+          <a:prstGeom prst="rect">
+            <a:avLst/>
+          </a:prstGeom>
+          <a:noFill/>
+          <a:ln/>
+        </p:spPr>
+        <p:txBody>
+          <a:bodyPr wrap="square" lIns="0" tIns="0" rIns="0" bIns="0" rtlCol="0" anchor="t"/>
+          <a:lstStyle/>
+          <a:p>
             <a:pPr indent="0" marL="0">
               <a:buNone/>
             </a:pPr>
             <a:r>
-              <a:rPr lang="en-US" sz="1250" i="1" dirty="0">
-                <a:solidFill>
-                  <a:srgbClr val="77839A"/>
+              <a:rPr lang="en-US" sz="1150" b="1" dirty="0">
+                <a:solidFill>
+                  <a:srgbClr val="E7ECF3"/>
                 </a:solidFill>
                 <a:latin typeface="Calibri" pitchFamily="34" charset="0"/>
                 <a:ea typeface="Calibri" pitchFamily="34" charset="-122"/>
                 <a:cs typeface="Calibri" pitchFamily="34" charset="-120"/>
               </a:rPr>
-              <a:t>the Monday risk sweep</a:t>
-            </a:r>
-            <a:endParaRPr lang="en-US" sz="1250" dirty="0"/>
-          </a:p>
-        </p:txBody>
-      </p:sp>
-      <p:sp>
-        <p:nvSpPr>
-          <p:cNvPr id="7" name="Text 5"/>
-          <p:cNvSpPr/>
-          <p:nvPr/>
-        </p:nvSpPr>
-        <p:spPr>
-          <a:xfrm>
-            <a:off x="841248" y="2898648"/>
-            <a:ext cx="1371600" cy="384048"/>
-          </a:xfrm>
-          <a:prstGeom prst="rect">
-            <a:avLst/>
-          </a:prstGeom>
-          <a:noFill/>
-          <a:ln/>
-        </p:spPr>
-        <p:txBody>
-          <a:bodyPr wrap="square" lIns="0" tIns="0" rIns="0" bIns="0" rtlCol="0" anchor="ctr"/>
+              <a:t>Stay on the default profile</a:t>
+            </a:r>
+            <a:endParaRPr lang="en-US" sz="1150" dirty="0"/>
+          </a:p>
+        </p:txBody>
+      </p:sp>
+      <p:sp>
+        <p:nvSpPr>
+          <p:cNvPr id="10" name="Text 8"/>
+          <p:cNvSpPr/>
+          <p:nvPr/>
+        </p:nvSpPr>
+        <p:spPr>
+          <a:xfrm>
+            <a:off x="1060704" y="2221992"/>
+            <a:ext cx="4640580" cy="219456"/>
+          </a:xfrm>
+          <a:prstGeom prst="rect">
+            <a:avLst/>
+          </a:prstGeom>
+          <a:noFill/>
+          <a:ln/>
+        </p:spPr>
+        <p:txBody>
+          <a:bodyPr wrap="square" lIns="0" tIns="0" rIns="0" bIns="0" rtlCol="0" anchor="t"/>
           <a:lstStyle/>
           <a:p>
             <a:pPr indent="0" marL="0">
               <a:buNone/>
             </a:pPr>
             <a:r>
-              <a:rPr lang="en-US" sz="950" dirty="0">
+              <a:rPr lang="en-US" sz="850" dirty="0">
                 <a:solidFill>
                   <a:srgbClr val="77839A"/>
                 </a:solidFill>
@@ -3285,22 +3477,47 @@
                 <a:ea typeface="Courier New" pitchFamily="34" charset="-122"/>
                 <a:cs typeface="Courier New" pitchFamily="34" charset="-120"/>
               </a:rPr>
-              <a:t>MODULES</a:t>
-            </a:r>
-            <a:endParaRPr lang="en-US" sz="950" dirty="0"/>
-          </a:p>
-        </p:txBody>
-      </p:sp>
-      <p:sp>
-        <p:nvSpPr>
-          <p:cNvPr id="8" name="Text 6"/>
-          <p:cNvSpPr/>
-          <p:nvPr/>
-        </p:nvSpPr>
-        <p:spPr>
-          <a:xfrm>
-            <a:off x="2258568" y="2898648"/>
-            <a:ext cx="3104388" cy="384048"/>
+              <a:t>no call · 8/8 modules, read-only</a:t>
+            </a:r>
+            <a:endParaRPr lang="en-US" sz="850" dirty="0"/>
+          </a:p>
+        </p:txBody>
+      </p:sp>
+      <p:sp>
+        <p:nvSpPr>
+          <p:cNvPr id="11" name="Shape 9"/>
+          <p:cNvSpPr/>
+          <p:nvPr/>
+        </p:nvSpPr>
+        <p:spPr>
+          <a:xfrm>
+            <a:off x="804672" y="2481943"/>
+            <a:ext cx="182880" cy="182880"/>
+          </a:xfrm>
+          <a:prstGeom prst="ellipse">
+            <a:avLst/>
+          </a:prstGeom>
+          <a:solidFill>
+            <a:srgbClr val="2A3341"/>
+          </a:solidFill>
+          <a:ln w="12700">
+            <a:solidFill>
+              <a:srgbClr val="333333"/>
+            </a:solidFill>
+            <a:prstDash val="solid"/>
+          </a:ln>
+        </p:spPr>
+      </p:sp>
+      <p:sp>
+        <p:nvSpPr>
+          <p:cNvPr id="12" name="Text 10"/>
+          <p:cNvSpPr/>
+          <p:nvPr/>
+        </p:nvSpPr>
+        <p:spPr>
+          <a:xfrm>
+            <a:off x="804672" y="2481943"/>
+            <a:ext cx="182880" cy="182880"/>
           </a:xfrm>
           <a:prstGeom prst="rect">
             <a:avLst/>
@@ -3312,11 +3529,50 @@
           <a:bodyPr wrap="square" lIns="0" tIns="0" rIns="0" bIns="0" rtlCol="0" anchor="ctr"/>
           <a:lstStyle/>
           <a:p>
-            <a:pPr algn="r" indent="0" marL="0">
-              <a:buNone/>
-            </a:pPr>
-            <a:r>
-              <a:rPr lang="en-US" sz="1250" dirty="0">
+            <a:pPr algn="ctr" indent="0" marL="0">
+              <a:buNone/>
+            </a:pPr>
+            <a:r>
+              <a:rPr lang="en-US" sz="750" dirty="0">
+                <a:solidFill>
+                  <a:srgbClr val="A3ADC0"/>
+                </a:solidFill>
+                <a:latin typeface="Courier New" pitchFamily="34" charset="0"/>
+                <a:ea typeface="Courier New" pitchFamily="34" charset="-122"/>
+                <a:cs typeface="Courier New" pitchFamily="34" charset="-120"/>
+              </a:rPr>
+              <a:t>2</a:t>
+            </a:r>
+            <a:endParaRPr lang="en-US" sz="750" dirty="0"/>
+          </a:p>
+        </p:txBody>
+      </p:sp>
+      <p:sp>
+        <p:nvSpPr>
+          <p:cNvPr id="13" name="Text 11"/>
+          <p:cNvSpPr/>
+          <p:nvPr/>
+        </p:nvSpPr>
+        <p:spPr>
+          <a:xfrm>
+            <a:off x="1060704" y="2454511"/>
+            <a:ext cx="4640580" cy="228600"/>
+          </a:xfrm>
+          <a:prstGeom prst="rect">
+            <a:avLst/>
+          </a:prstGeom>
+          <a:noFill/>
+          <a:ln/>
+        </p:spPr>
+        <p:txBody>
+          <a:bodyPr wrap="square" lIns="0" tIns="0" rIns="0" bIns="0" rtlCol="0" anchor="t"/>
+          <a:lstStyle/>
+          <a:p>
+            <a:pPr indent="0" marL="0">
+              <a:buNone/>
+            </a:pPr>
+            <a:r>
+              <a:rPr lang="en-US" sz="1150" b="1" dirty="0">
                 <a:solidFill>
                   <a:srgbClr val="E7ECF3"/>
                 </a:solidFill>
@@ -3324,38 +3580,38 @@
                 <a:ea typeface="Calibri" pitchFamily="34" charset="-122"/>
                 <a:cs typeface="Calibri" pitchFamily="34" charset="-120"/>
               </a:rPr>
-              <a:t>All 8 in scope</a:t>
-            </a:r>
-            <a:endParaRPr lang="en-US" sz="1250" dirty="0"/>
-          </a:p>
-        </p:txBody>
-      </p:sp>
-      <p:sp>
-        <p:nvSpPr>
-          <p:cNvPr id="9" name="Text 7"/>
-          <p:cNvSpPr/>
-          <p:nvPr/>
-        </p:nvSpPr>
-        <p:spPr>
-          <a:xfrm>
-            <a:off x="841248" y="3429000"/>
-            <a:ext cx="1371600" cy="384048"/>
-          </a:xfrm>
-          <a:prstGeom prst="rect">
-            <a:avLst/>
-          </a:prstGeom>
-          <a:noFill/>
-          <a:ln/>
-        </p:spPr>
-        <p:txBody>
-          <a:bodyPr wrap="square" lIns="0" tIns="0" rIns="0" bIns="0" rtlCol="0" anchor="ctr"/>
+              <a:t>Ask for the ranked risk list</a:t>
+            </a:r>
+            <a:endParaRPr lang="en-US" sz="1150" dirty="0"/>
+          </a:p>
+        </p:txBody>
+      </p:sp>
+      <p:sp>
+        <p:nvSpPr>
+          <p:cNvPr id="14" name="Text 12"/>
+          <p:cNvSpPr/>
+          <p:nvPr/>
+        </p:nvSpPr>
+        <p:spPr>
+          <a:xfrm>
+            <a:off x="1060704" y="2664823"/>
+            <a:ext cx="4640580" cy="219456"/>
+          </a:xfrm>
+          <a:prstGeom prst="rect">
+            <a:avLst/>
+          </a:prstGeom>
+          <a:noFill/>
+          <a:ln/>
+        </p:spPr>
+        <p:txBody>
+          <a:bodyPr wrap="square" lIns="0" tIns="0" rIns="0" bIns="0" rtlCol="0" anchor="t"/>
           <a:lstStyle/>
           <a:p>
             <a:pPr indent="0" marL="0">
               <a:buNone/>
             </a:pPr>
             <a:r>
-              <a:rPr lang="en-US" sz="950" dirty="0">
+              <a:rPr lang="en-US" sz="850" dirty="0">
                 <a:solidFill>
                   <a:srgbClr val="77839A"/>
                 </a:solidFill>
@@ -3363,22 +3619,47 @@
                 <a:ea typeface="Courier New" pitchFamily="34" charset="-122"/>
                 <a:cs typeface="Courier New" pitchFamily="34" charset="-120"/>
               </a:rPr>
-              <a:t>MODE</a:t>
-            </a:r>
-            <a:endParaRPr lang="en-US" sz="950" dirty="0"/>
-          </a:p>
-        </p:txBody>
-      </p:sp>
-      <p:sp>
-        <p:nvSpPr>
-          <p:cNvPr id="10" name="Text 8"/>
-          <p:cNvSpPr/>
-          <p:nvPr/>
-        </p:nvSpPr>
-        <p:spPr>
-          <a:xfrm>
-            <a:off x="2258568" y="3429000"/>
-            <a:ext cx="3104388" cy="384048"/>
+              <a:t>POST /api/chat → csam.risk_ranking</a:t>
+            </a:r>
+            <a:endParaRPr lang="en-US" sz="850" dirty="0"/>
+          </a:p>
+        </p:txBody>
+      </p:sp>
+      <p:sp>
+        <p:nvSpPr>
+          <p:cNvPr id="15" name="Shape 13"/>
+          <p:cNvSpPr/>
+          <p:nvPr/>
+        </p:nvSpPr>
+        <p:spPr>
+          <a:xfrm>
+            <a:off x="804672" y="2924774"/>
+            <a:ext cx="182880" cy="182880"/>
+          </a:xfrm>
+          <a:prstGeom prst="ellipse">
+            <a:avLst/>
+          </a:prstGeom>
+          <a:solidFill>
+            <a:srgbClr val="2A3341"/>
+          </a:solidFill>
+          <a:ln w="12700">
+            <a:solidFill>
+              <a:srgbClr val="333333"/>
+            </a:solidFill>
+            <a:prstDash val="solid"/>
+          </a:ln>
+        </p:spPr>
+      </p:sp>
+      <p:sp>
+        <p:nvSpPr>
+          <p:cNvPr id="16" name="Text 14"/>
+          <p:cNvSpPr/>
+          <p:nvPr/>
+        </p:nvSpPr>
+        <p:spPr>
+          <a:xfrm>
+            <a:off x="804672" y="2924774"/>
+            <a:ext cx="182880" cy="182880"/>
           </a:xfrm>
           <a:prstGeom prst="rect">
             <a:avLst/>
@@ -3390,11 +3671,50 @@
           <a:bodyPr wrap="square" lIns="0" tIns="0" rIns="0" bIns="0" rtlCol="0" anchor="ctr"/>
           <a:lstStyle/>
           <a:p>
-            <a:pPr algn="r" indent="0" marL="0">
-              <a:buNone/>
-            </a:pPr>
-            <a:r>
-              <a:rPr lang="en-US" sz="1250" dirty="0">
+            <a:pPr algn="ctr" indent="0" marL="0">
+              <a:buNone/>
+            </a:pPr>
+            <a:r>
+              <a:rPr lang="en-US" sz="750" dirty="0">
+                <a:solidFill>
+                  <a:srgbClr val="A3ADC0"/>
+                </a:solidFill>
+                <a:latin typeface="Courier New" pitchFamily="34" charset="0"/>
+                <a:ea typeface="Courier New" pitchFamily="34" charset="-122"/>
+                <a:cs typeface="Courier New" pitchFamily="34" charset="-120"/>
+              </a:rPr>
+              <a:t>3</a:t>
+            </a:r>
+            <a:endParaRPr lang="en-US" sz="750" dirty="0"/>
+          </a:p>
+        </p:txBody>
+      </p:sp>
+      <p:sp>
+        <p:nvSpPr>
+          <p:cNvPr id="17" name="Text 15"/>
+          <p:cNvSpPr/>
+          <p:nvPr/>
+        </p:nvSpPr>
+        <p:spPr>
+          <a:xfrm>
+            <a:off x="1060704" y="2897342"/>
+            <a:ext cx="4640580" cy="228600"/>
+          </a:xfrm>
+          <a:prstGeom prst="rect">
+            <a:avLst/>
+          </a:prstGeom>
+          <a:noFill/>
+          <a:ln/>
+        </p:spPr>
+        <p:txBody>
+          <a:bodyPr wrap="square" lIns="0" tIns="0" rIns="0" bIns="0" rtlCol="0" anchor="t"/>
+          <a:lstStyle/>
+          <a:p>
+            <a:pPr indent="0" marL="0">
+              <a:buNone/>
+            </a:pPr>
+            <a:r>
+              <a:rPr lang="en-US" sz="1150" b="1" dirty="0">
                 <a:solidFill>
                   <a:srgbClr val="E7ECF3"/>
                 </a:solidFill>
@@ -3402,38 +3722,38 @@
                 <a:ea typeface="Calibri" pitchFamily="34" charset="-122"/>
                 <a:cs typeface="Calibri" pitchFamily="34" charset="-120"/>
               </a:rPr>
-              <a:t>Read-only (DENY_WRITE=1)</a:t>
-            </a:r>
-            <a:endParaRPr lang="en-US" sz="1250" dirty="0"/>
-          </a:p>
-        </p:txBody>
-      </p:sp>
-      <p:sp>
-        <p:nvSpPr>
-          <p:cNvPr id="11" name="Text 9"/>
-          <p:cNvSpPr/>
-          <p:nvPr/>
-        </p:nvSpPr>
-        <p:spPr>
-          <a:xfrm>
-            <a:off x="841248" y="3959352"/>
-            <a:ext cx="1371600" cy="384048"/>
-          </a:xfrm>
-          <a:prstGeom prst="rect">
-            <a:avLst/>
-          </a:prstGeom>
-          <a:noFill/>
-          <a:ln/>
-        </p:spPr>
-        <p:txBody>
-          <a:bodyPr wrap="square" lIns="0" tIns="0" rIns="0" bIns="0" rtlCol="0" anchor="ctr"/>
+              <a:t>Scan the ranking</a:t>
+            </a:r>
+            <a:endParaRPr lang="en-US" sz="1150" dirty="0"/>
+          </a:p>
+        </p:txBody>
+      </p:sp>
+      <p:sp>
+        <p:nvSpPr>
+          <p:cNvPr id="18" name="Text 16"/>
+          <p:cNvSpPr/>
+          <p:nvPr/>
+        </p:nvSpPr>
+        <p:spPr>
+          <a:xfrm>
+            <a:off x="1060704" y="3107654"/>
+            <a:ext cx="4640580" cy="219456"/>
+          </a:xfrm>
+          <a:prstGeom prst="rect">
+            <a:avLst/>
+          </a:prstGeom>
+          <a:noFill/>
+          <a:ln/>
+        </p:spPr>
+        <p:txBody>
+          <a:bodyPr wrap="square" lIns="0" tIns="0" rIns="0" bIns="0" rtlCol="0" anchor="t"/>
           <a:lstStyle/>
           <a:p>
             <a:pPr indent="0" marL="0">
               <a:buNone/>
             </a:pPr>
             <a:r>
-              <a:rPr lang="en-US" sz="950" dirty="0">
+              <a:rPr lang="en-US" sz="850" dirty="0">
                 <a:solidFill>
                   <a:srgbClr val="77839A"/>
                 </a:solidFill>
@@ -3441,22 +3761,47 @@
                 <a:ea typeface="Courier New" pitchFamily="34" charset="-122"/>
                 <a:cs typeface="Courier New" pitchFamily="34" charset="-120"/>
               </a:rPr>
-              <a:t>EVIDENCE</a:t>
-            </a:r>
-            <a:endParaRPr lang="en-US" sz="950" dirty="0"/>
-          </a:p>
-        </p:txBody>
-      </p:sp>
-      <p:sp>
-        <p:nvSpPr>
-          <p:cNvPr id="12" name="Text 10"/>
-          <p:cNvSpPr/>
-          <p:nvPr/>
-        </p:nvSpPr>
-        <p:spPr>
-          <a:xfrm>
-            <a:off x="2258568" y="3959352"/>
-            <a:ext cx="3104388" cy="384048"/>
+              <a:t>prod-checkout-web-01 · 96 · CRITICAL</a:t>
+            </a:r>
+            <a:endParaRPr lang="en-US" sz="850" dirty="0"/>
+          </a:p>
+        </p:txBody>
+      </p:sp>
+      <p:sp>
+        <p:nvSpPr>
+          <p:cNvPr id="19" name="Shape 17"/>
+          <p:cNvSpPr/>
+          <p:nvPr/>
+        </p:nvSpPr>
+        <p:spPr>
+          <a:xfrm>
+            <a:off x="804672" y="3367605"/>
+            <a:ext cx="182880" cy="182880"/>
+          </a:xfrm>
+          <a:prstGeom prst="ellipse">
+            <a:avLst/>
+          </a:prstGeom>
+          <a:solidFill>
+            <a:srgbClr val="2A3341"/>
+          </a:solidFill>
+          <a:ln w="12700">
+            <a:solidFill>
+              <a:srgbClr val="333333"/>
+            </a:solidFill>
+            <a:prstDash val="solid"/>
+          </a:ln>
+        </p:spPr>
+      </p:sp>
+      <p:sp>
+        <p:nvSpPr>
+          <p:cNvPr id="20" name="Text 18"/>
+          <p:cNvSpPr/>
+          <p:nvPr/>
+        </p:nvSpPr>
+        <p:spPr>
+          <a:xfrm>
+            <a:off x="804672" y="3367605"/>
+            <a:ext cx="182880" cy="182880"/>
           </a:xfrm>
           <a:prstGeom prst="rect">
             <a:avLst/>
@@ -3468,11 +3813,50 @@
           <a:bodyPr wrap="square" lIns="0" tIns="0" rIns="0" bIns="0" rtlCol="0" anchor="ctr"/>
           <a:lstStyle/>
           <a:p>
-            <a:pPr algn="r" indent="0" marL="0">
-              <a:buNone/>
-            </a:pPr>
-            <a:r>
-              <a:rPr lang="en-US" sz="1250" dirty="0">
+            <a:pPr algn="ctr" indent="0" marL="0">
+              <a:buNone/>
+            </a:pPr>
+            <a:r>
+              <a:rPr lang="en-US" sz="750" dirty="0">
+                <a:solidFill>
+                  <a:srgbClr val="A3ADC0"/>
+                </a:solidFill>
+                <a:latin typeface="Courier New" pitchFamily="34" charset="0"/>
+                <a:ea typeface="Courier New" pitchFamily="34" charset="-122"/>
+                <a:cs typeface="Courier New" pitchFamily="34" charset="-120"/>
+              </a:rPr>
+              <a:t>4</a:t>
+            </a:r>
+            <a:endParaRPr lang="en-US" sz="750" dirty="0"/>
+          </a:p>
+        </p:txBody>
+      </p:sp>
+      <p:sp>
+        <p:nvSpPr>
+          <p:cNvPr id="21" name="Text 19"/>
+          <p:cNvSpPr/>
+          <p:nvPr/>
+        </p:nvSpPr>
+        <p:spPr>
+          <a:xfrm>
+            <a:off x="1060704" y="3340173"/>
+            <a:ext cx="4640580" cy="228600"/>
+          </a:xfrm>
+          <a:prstGeom prst="rect">
+            <a:avLst/>
+          </a:prstGeom>
+          <a:noFill/>
+          <a:ln/>
+        </p:spPr>
+        <p:txBody>
+          <a:bodyPr wrap="square" lIns="0" tIns="0" rIns="0" bIns="0" rtlCol="0" anchor="t"/>
+          <a:lstStyle/>
+          <a:p>
+            <a:pPr indent="0" marL="0">
+              <a:buNone/>
+            </a:pPr>
+            <a:r>
+              <a:rPr lang="en-US" sz="1150" b="1" dirty="0">
                 <a:solidFill>
                   <a:srgbClr val="E7ECF3"/>
                 </a:solidFill>
@@ -3480,38 +3864,38 @@
                 <a:ea typeface="Calibri" pitchFamily="34" charset="-122"/>
                 <a:cs typeface="Calibri" pitchFamily="34" charset="-120"/>
               </a:rPr>
-              <a:t>Full cross-module chain</a:t>
-            </a:r>
-            <a:endParaRPr lang="en-US" sz="1250" dirty="0"/>
-          </a:p>
-        </p:txBody>
-      </p:sp>
-      <p:sp>
-        <p:nvSpPr>
-          <p:cNvPr id="13" name="Text 11"/>
-          <p:cNvSpPr/>
-          <p:nvPr/>
-        </p:nvSpPr>
-        <p:spPr>
-          <a:xfrm>
-            <a:off x="841248" y="4489704"/>
-            <a:ext cx="1371600" cy="384048"/>
-          </a:xfrm>
-          <a:prstGeom prst="rect">
-            <a:avLst/>
-          </a:prstGeom>
-          <a:noFill/>
-          <a:ln/>
-        </p:spPr>
-        <p:txBody>
-          <a:bodyPr wrap="square" lIns="0" tIns="0" rIns="0" bIns="0" rtlCol="0" anchor="ctr"/>
+              <a:t>Expand the top asset</a:t>
+            </a:r>
+            <a:endParaRPr lang="en-US" sz="1150" dirty="0"/>
+          </a:p>
+        </p:txBody>
+      </p:sp>
+      <p:sp>
+        <p:nvSpPr>
+          <p:cNvPr id="22" name="Text 20"/>
+          <p:cNvSpPr/>
+          <p:nvPr/>
+        </p:nvSpPr>
+        <p:spPr>
+          <a:xfrm>
+            <a:off x="1060704" y="3550485"/>
+            <a:ext cx="4640580" cy="219456"/>
+          </a:xfrm>
+          <a:prstGeom prst="rect">
+            <a:avLst/>
+          </a:prstGeom>
+          <a:noFill/>
+          <a:ln/>
+        </p:spPr>
+        <p:txBody>
+          <a:bodyPr wrap="square" lIns="0" tIns="0" rIns="0" bIns="0" rtlCol="0" anchor="t"/>
           <a:lstStyle/>
           <a:p>
             <a:pPr indent="0" marL="0">
               <a:buNone/>
             </a:pPr>
             <a:r>
-              <a:rPr lang="en-US" sz="950" dirty="0">
+              <a:rPr lang="en-US" sz="850" dirty="0">
                 <a:solidFill>
                   <a:srgbClr val="77839A"/>
                 </a:solidFill>
@@ -3519,22 +3903,47 @@
                 <a:ea typeface="Courier New" pitchFamily="34" charset="-122"/>
                 <a:cs typeface="Courier New" pitchFamily="34" charset="-120"/>
               </a:rPr>
-              <a:t>AUDIT</a:t>
-            </a:r>
-            <a:endParaRPr lang="en-US" sz="950" dirty="0"/>
-          </a:p>
-        </p:txBody>
-      </p:sp>
-      <p:sp>
-        <p:nvSpPr>
-          <p:cNvPr id="14" name="Text 12"/>
-          <p:cNvSpPr/>
-          <p:nvPr/>
-        </p:nvSpPr>
-        <p:spPr>
-          <a:xfrm>
-            <a:off x="2258568" y="4489704"/>
-            <a:ext cx="3104388" cy="384048"/>
+              <a:t>GET /api/assets/…/evidence · 5/5 visible</a:t>
+            </a:r>
+            <a:endParaRPr lang="en-US" sz="850" dirty="0"/>
+          </a:p>
+        </p:txBody>
+      </p:sp>
+      <p:sp>
+        <p:nvSpPr>
+          <p:cNvPr id="23" name="Shape 21"/>
+          <p:cNvSpPr/>
+          <p:nvPr/>
+        </p:nvSpPr>
+        <p:spPr>
+          <a:xfrm>
+            <a:off x="804672" y="3810435"/>
+            <a:ext cx="182880" cy="182880"/>
+          </a:xfrm>
+          <a:prstGeom prst="ellipse">
+            <a:avLst/>
+          </a:prstGeom>
+          <a:solidFill>
+            <a:srgbClr val="2A3341"/>
+          </a:solidFill>
+          <a:ln w="12700">
+            <a:solidFill>
+              <a:srgbClr val="333333"/>
+            </a:solidFill>
+            <a:prstDash val="solid"/>
+          </a:ln>
+        </p:spPr>
+      </p:sp>
+      <p:sp>
+        <p:nvSpPr>
+          <p:cNvPr id="24" name="Text 22"/>
+          <p:cNvSpPr/>
+          <p:nvPr/>
+        </p:nvSpPr>
+        <p:spPr>
+          <a:xfrm>
+            <a:off x="804672" y="3810435"/>
+            <a:ext cx="182880" cy="182880"/>
           </a:xfrm>
           <a:prstGeom prst="rect">
             <a:avLst/>
@@ -3546,11 +3955,50 @@
           <a:bodyPr wrap="square" lIns="0" tIns="0" rIns="0" bIns="0" rtlCol="0" anchor="ctr"/>
           <a:lstStyle/>
           <a:p>
-            <a:pPr algn="r" indent="0" marL="0">
-              <a:buNone/>
-            </a:pPr>
-            <a:r>
-              <a:rPr lang="en-US" sz="1250" dirty="0">
+            <a:pPr algn="ctr" indent="0" marL="0">
+              <a:buNone/>
+            </a:pPr>
+            <a:r>
+              <a:rPr lang="en-US" sz="750" dirty="0">
+                <a:solidFill>
+                  <a:srgbClr val="A3ADC0"/>
+                </a:solidFill>
+                <a:latin typeface="Courier New" pitchFamily="34" charset="0"/>
+                <a:ea typeface="Courier New" pitchFamily="34" charset="-122"/>
+                <a:cs typeface="Courier New" pitchFamily="34" charset="-120"/>
+              </a:rPr>
+              <a:t>5</a:t>
+            </a:r>
+            <a:endParaRPr lang="en-US" sz="750" dirty="0"/>
+          </a:p>
+        </p:txBody>
+      </p:sp>
+      <p:sp>
+        <p:nvSpPr>
+          <p:cNvPr id="25" name="Text 23"/>
+          <p:cNvSpPr/>
+          <p:nvPr/>
+        </p:nvSpPr>
+        <p:spPr>
+          <a:xfrm>
+            <a:off x="1060704" y="3783003"/>
+            <a:ext cx="4640580" cy="228600"/>
+          </a:xfrm>
+          <a:prstGeom prst="rect">
+            <a:avLst/>
+          </a:prstGeom>
+          <a:noFill/>
+          <a:ln/>
+        </p:spPr>
+        <p:txBody>
+          <a:bodyPr wrap="square" lIns="0" tIns="0" rIns="0" bIns="0" rtlCol="0" anchor="t"/>
+          <a:lstStyle/>
+          <a:p>
+            <a:pPr indent="0" marL="0">
+              <a:buNone/>
+            </a:pPr>
+            <a:r>
+              <a:rPr lang="en-US" sz="1150" b="1" dirty="0">
                 <a:solidFill>
                   <a:srgbClr val="E7ECF3"/>
                 </a:solidFill>
@@ -3558,30 +4006,395 @@
                 <a:ea typeface="Calibri" pitchFamily="34" charset="-122"/>
                 <a:cs typeface="Calibri" pitchFamily="34" charset="-120"/>
               </a:rPr>
-              <a:t>Every call, JSONL</a:t>
-            </a:r>
-            <a:endParaRPr lang="en-US" sz="1250" dirty="0"/>
-          </a:p>
-        </p:txBody>
-      </p:sp>
-      <p:sp>
-        <p:nvSpPr>
-          <p:cNvPr id="15" name="Shape 13"/>
-          <p:cNvSpPr/>
-          <p:nvPr/>
-        </p:nvSpPr>
-        <p:spPr>
-          <a:xfrm>
-            <a:off x="6551676" y="1856232"/>
-            <a:ext cx="5070348" cy="3291840"/>
+              <a:t>Ask a cross-module follow-up</a:t>
+            </a:r>
+            <a:endParaRPr lang="en-US" sz="1150" dirty="0"/>
+          </a:p>
+        </p:txBody>
+      </p:sp>
+      <p:sp>
+        <p:nvSpPr>
+          <p:cNvPr id="26" name="Text 24"/>
+          <p:cNvSpPr/>
+          <p:nvPr/>
+        </p:nvSpPr>
+        <p:spPr>
+          <a:xfrm>
+            <a:off x="1060704" y="3993315"/>
+            <a:ext cx="4640580" cy="219456"/>
+          </a:xfrm>
+          <a:prstGeom prst="rect">
+            <a:avLst/>
+          </a:prstGeom>
+          <a:noFill/>
+          <a:ln/>
+        </p:spPr>
+        <p:txBody>
+          <a:bodyPr wrap="square" lIns="0" tIns="0" rIns="0" bIns="0" rtlCol="0" anchor="t"/>
+          <a:lstStyle/>
+          <a:p>
+            <a:pPr indent="0" marL="0">
+              <a:buNone/>
+            </a:pPr>
+            <a:r>
+              <a:rPr lang="en-US" sz="850" dirty="0">
+                <a:solidFill>
+                  <a:srgbClr val="77839A"/>
+                </a:solidFill>
+                <a:latin typeface="Courier New" pitchFamily="34" charset="0"/>
+                <a:ea typeface="Courier New" pitchFamily="34" charset="-122"/>
+                <a:cs typeface="Courier New" pitchFamily="34" charset="-120"/>
+              </a:rPr>
+              <a:t>POST /api/chat → module CA</a:t>
+            </a:r>
+            <a:endParaRPr lang="en-US" sz="850" dirty="0"/>
+          </a:p>
+        </p:txBody>
+      </p:sp>
+      <p:sp>
+        <p:nvSpPr>
+          <p:cNvPr id="27" name="Shape 25"/>
+          <p:cNvSpPr/>
+          <p:nvPr/>
+        </p:nvSpPr>
+        <p:spPr>
+          <a:xfrm>
+            <a:off x="804672" y="4253266"/>
+            <a:ext cx="182880" cy="182880"/>
+          </a:xfrm>
+          <a:prstGeom prst="ellipse">
+            <a:avLst/>
+          </a:prstGeom>
+          <a:solidFill>
+            <a:srgbClr val="2A3341"/>
+          </a:solidFill>
+          <a:ln w="12700">
+            <a:solidFill>
+              <a:srgbClr val="333333"/>
+            </a:solidFill>
+            <a:prstDash val="solid"/>
+          </a:ln>
+        </p:spPr>
+      </p:sp>
+      <p:sp>
+        <p:nvSpPr>
+          <p:cNvPr id="28" name="Text 26"/>
+          <p:cNvSpPr/>
+          <p:nvPr/>
+        </p:nvSpPr>
+        <p:spPr>
+          <a:xfrm>
+            <a:off x="804672" y="4253266"/>
+            <a:ext cx="182880" cy="182880"/>
+          </a:xfrm>
+          <a:prstGeom prst="rect">
+            <a:avLst/>
+          </a:prstGeom>
+          <a:noFill/>
+          <a:ln/>
+        </p:spPr>
+        <p:txBody>
+          <a:bodyPr wrap="square" lIns="0" tIns="0" rIns="0" bIns="0" rtlCol="0" anchor="ctr"/>
+          <a:lstStyle/>
+          <a:p>
+            <a:pPr algn="ctr" indent="0" marL="0">
+              <a:buNone/>
+            </a:pPr>
+            <a:r>
+              <a:rPr lang="en-US" sz="750" dirty="0">
+                <a:solidFill>
+                  <a:srgbClr val="A3ADC0"/>
+                </a:solidFill>
+                <a:latin typeface="Courier New" pitchFamily="34" charset="0"/>
+                <a:ea typeface="Courier New" pitchFamily="34" charset="-122"/>
+                <a:cs typeface="Courier New" pitchFamily="34" charset="-120"/>
+              </a:rPr>
+              <a:t>6</a:t>
+            </a:r>
+            <a:endParaRPr lang="en-US" sz="750" dirty="0"/>
+          </a:p>
+        </p:txBody>
+      </p:sp>
+      <p:sp>
+        <p:nvSpPr>
+          <p:cNvPr id="29" name="Text 27"/>
+          <p:cNvSpPr/>
+          <p:nvPr/>
+        </p:nvSpPr>
+        <p:spPr>
+          <a:xfrm>
+            <a:off x="1060704" y="4225834"/>
+            <a:ext cx="4640580" cy="228600"/>
+          </a:xfrm>
+          <a:prstGeom prst="rect">
+            <a:avLst/>
+          </a:prstGeom>
+          <a:noFill/>
+          <a:ln/>
+        </p:spPr>
+        <p:txBody>
+          <a:bodyPr wrap="square" lIns="0" tIns="0" rIns="0" bIns="0" rtlCol="0" anchor="t"/>
+          <a:lstStyle/>
+          <a:p>
+            <a:pPr indent="0" marL="0">
+              <a:buNone/>
+            </a:pPr>
+            <a:r>
+              <a:rPr lang="en-US" sz="1150" b="1" dirty="0">
+                <a:solidFill>
+                  <a:srgbClr val="E7ECF3"/>
+                </a:solidFill>
+                <a:latin typeface="Calibri" pitchFamily="34" charset="0"/>
+                <a:ea typeface="Calibri" pitchFamily="34" charset="-122"/>
+                <a:cs typeface="Calibri" pitchFamily="34" charset="-120"/>
+              </a:rPr>
+              <a:t>Try a write command anyway</a:t>
+            </a:r>
+            <a:endParaRPr lang="en-US" sz="1150" dirty="0"/>
+          </a:p>
+        </p:txBody>
+      </p:sp>
+      <p:sp>
+        <p:nvSpPr>
+          <p:cNvPr id="30" name="Text 28"/>
+          <p:cNvSpPr/>
+          <p:nvPr/>
+        </p:nvSpPr>
+        <p:spPr>
+          <a:xfrm>
+            <a:off x="1060704" y="4436146"/>
+            <a:ext cx="4640580" cy="219456"/>
+          </a:xfrm>
+          <a:prstGeom prst="rect">
+            <a:avLst/>
+          </a:prstGeom>
+          <a:noFill/>
+          <a:ln/>
+        </p:spPr>
+        <p:txBody>
+          <a:bodyPr wrap="square" lIns="0" tIns="0" rIns="0" bIns="0" rtlCol="0" anchor="t"/>
+          <a:lstStyle/>
+          <a:p>
+            <a:pPr indent="0" marL="0">
+              <a:buNone/>
+            </a:pPr>
+            <a:r>
+              <a:rPr lang="en-US" sz="850" dirty="0">
+                <a:solidFill>
+                  <a:srgbClr val="E8654A"/>
+                </a:solidFill>
+                <a:latin typeface="Courier New" pitchFamily="34" charset="0"/>
+                <a:ea typeface="Courier New" pitchFamily="34" charset="-122"/>
+                <a:cs typeface="Courier New" pitchFamily="34" charset="-120"/>
+              </a:rPr>
+              <a:t>POST /api/qualys-cli → 403 blocked</a:t>
+            </a:r>
+            <a:endParaRPr lang="en-US" sz="850" dirty="0"/>
+          </a:p>
+        </p:txBody>
+      </p:sp>
+      <p:sp>
+        <p:nvSpPr>
+          <p:cNvPr id="31" name="Shape 29"/>
+          <p:cNvSpPr/>
+          <p:nvPr/>
+        </p:nvSpPr>
+        <p:spPr>
+          <a:xfrm>
+            <a:off x="804672" y="4696097"/>
+            <a:ext cx="182880" cy="182880"/>
+          </a:xfrm>
+          <a:prstGeom prst="ellipse">
+            <a:avLst/>
+          </a:prstGeom>
+          <a:solidFill>
+            <a:srgbClr val="2A3341"/>
+          </a:solidFill>
+          <a:ln w="12700">
+            <a:solidFill>
+              <a:srgbClr val="333333"/>
+            </a:solidFill>
+            <a:prstDash val="solid"/>
+          </a:ln>
+        </p:spPr>
+      </p:sp>
+      <p:sp>
+        <p:nvSpPr>
+          <p:cNvPr id="32" name="Text 30"/>
+          <p:cNvSpPr/>
+          <p:nvPr/>
+        </p:nvSpPr>
+        <p:spPr>
+          <a:xfrm>
+            <a:off x="804672" y="4696097"/>
+            <a:ext cx="182880" cy="182880"/>
+          </a:xfrm>
+          <a:prstGeom prst="rect">
+            <a:avLst/>
+          </a:prstGeom>
+          <a:noFill/>
+          <a:ln/>
+        </p:spPr>
+        <p:txBody>
+          <a:bodyPr wrap="square" lIns="0" tIns="0" rIns="0" bIns="0" rtlCol="0" anchor="ctr"/>
+          <a:lstStyle/>
+          <a:p>
+            <a:pPr algn="ctr" indent="0" marL="0">
+              <a:buNone/>
+            </a:pPr>
+            <a:r>
+              <a:rPr lang="en-US" sz="750" dirty="0">
+                <a:solidFill>
+                  <a:srgbClr val="A3ADC0"/>
+                </a:solidFill>
+                <a:latin typeface="Courier New" pitchFamily="34" charset="0"/>
+                <a:ea typeface="Courier New" pitchFamily="34" charset="-122"/>
+                <a:cs typeface="Courier New" pitchFamily="34" charset="-120"/>
+              </a:rPr>
+              <a:t>7</a:t>
+            </a:r>
+            <a:endParaRPr lang="en-US" sz="750" dirty="0"/>
+          </a:p>
+        </p:txBody>
+      </p:sp>
+      <p:sp>
+        <p:nvSpPr>
+          <p:cNvPr id="33" name="Text 31"/>
+          <p:cNvSpPr/>
+          <p:nvPr/>
+        </p:nvSpPr>
+        <p:spPr>
+          <a:xfrm>
+            <a:off x="1060704" y="4668665"/>
+            <a:ext cx="4640580" cy="228600"/>
+          </a:xfrm>
+          <a:prstGeom prst="rect">
+            <a:avLst/>
+          </a:prstGeom>
+          <a:noFill/>
+          <a:ln/>
+        </p:spPr>
+        <p:txBody>
+          <a:bodyPr wrap="square" lIns="0" tIns="0" rIns="0" bIns="0" rtlCol="0" anchor="t"/>
+          <a:lstStyle/>
+          <a:p>
+            <a:pPr indent="0" marL="0">
+              <a:buNone/>
+            </a:pPr>
+            <a:r>
+              <a:rPr lang="en-US" sz="1150" b="1" dirty="0">
+                <a:solidFill>
+                  <a:srgbClr val="E7ECF3"/>
+                </a:solidFill>
+                <a:latin typeface="Calibri" pitchFamily="34" charset="0"/>
+                <a:ea typeface="Calibri" pitchFamily="34" charset="-122"/>
+                <a:cs typeface="Calibri" pitchFamily="34" charset="-120"/>
+              </a:rPr>
+              <a:t>Open the audit log</a:t>
+            </a:r>
+            <a:endParaRPr lang="en-US" sz="1150" dirty="0"/>
+          </a:p>
+        </p:txBody>
+      </p:sp>
+      <p:sp>
+        <p:nvSpPr>
+          <p:cNvPr id="34" name="Text 32"/>
+          <p:cNvSpPr/>
+          <p:nvPr/>
+        </p:nvSpPr>
+        <p:spPr>
+          <a:xfrm>
+            <a:off x="1060704" y="4878977"/>
+            <a:ext cx="4640580" cy="219456"/>
+          </a:xfrm>
+          <a:prstGeom prst="rect">
+            <a:avLst/>
+          </a:prstGeom>
+          <a:noFill/>
+          <a:ln/>
+        </p:spPr>
+        <p:txBody>
+          <a:bodyPr wrap="square" lIns="0" tIns="0" rIns="0" bIns="0" rtlCol="0" anchor="t"/>
+          <a:lstStyle/>
+          <a:p>
+            <a:pPr indent="0" marL="0">
+              <a:buNone/>
+            </a:pPr>
+            <a:r>
+              <a:rPr lang="en-US" sz="850" dirty="0">
+                <a:solidFill>
+                  <a:srgbClr val="77839A"/>
+                </a:solidFill>
+                <a:latin typeface="Courier New" pitchFamily="34" charset="0"/>
+                <a:ea typeface="Courier New" pitchFamily="34" charset="-122"/>
+                <a:cs typeface="Courier New" pitchFamily="34" charset="-120"/>
+              </a:rPr>
+              <a:t>GET /api/audit</a:t>
+            </a:r>
+            <a:endParaRPr lang="en-US" sz="850" dirty="0"/>
+          </a:p>
+        </p:txBody>
+      </p:sp>
+      <p:sp>
+        <p:nvSpPr>
+          <p:cNvPr id="35" name="Text 33"/>
+          <p:cNvSpPr/>
+          <p:nvPr/>
+        </p:nvSpPr>
+        <p:spPr>
+          <a:xfrm>
+            <a:off x="804672" y="5166360"/>
+            <a:ext cx="4914900" cy="457200"/>
+          </a:xfrm>
+          <a:prstGeom prst="rect">
+            <a:avLst/>
+          </a:prstGeom>
+          <a:noFill/>
+          <a:ln/>
+        </p:spPr>
+        <p:txBody>
+          <a:bodyPr wrap="square" lIns="0" tIns="0" rIns="0" bIns="0" rtlCol="0" anchor="ctr"/>
+          <a:lstStyle/>
+          <a:p>
+            <a:pPr indent="0" marL="0">
+              <a:lnSpc>
+                <a:spcPts val="1400"/>
+              </a:lnSpc>
+              <a:buNone/>
+            </a:pPr>
+            <a:r>
+              <a:rPr lang="en-US" sz="1100" dirty="0">
+                <a:solidFill>
+                  <a:srgbClr val="A3ADC0"/>
+                </a:solidFill>
+                <a:latin typeface="Calibri" pitchFamily="34" charset="0"/>
+                <a:ea typeface="Calibri" pitchFamily="34" charset="-122"/>
+                <a:cs typeface="Calibri" pitchFamily="34" charset="-120"/>
+              </a:rPr>
+              <a:t>Leaves with a cross-module remediation picture — and a defensible trail of how it was built.</a:t>
+            </a:r>
+            <a:endParaRPr lang="en-US" sz="1100" dirty="0"/>
+          </a:p>
+        </p:txBody>
+      </p:sp>
+      <p:sp>
+        <p:nvSpPr>
+          <p:cNvPr id="36" name="Shape 34"/>
+          <p:cNvSpPr/>
+          <p:nvPr/>
+        </p:nvSpPr>
+        <p:spPr>
+          <a:xfrm>
+            <a:off x="6231636" y="1444752"/>
+            <a:ext cx="5390388" cy="4270248"/>
           </a:xfrm>
           <a:prstGeom prst="roundRect">
             <a:avLst>
-              <a:gd name="adj" fmla="val 1667"/>
+              <a:gd name="adj" fmla="val 1285"/>
             </a:avLst>
           </a:prstGeom>
           <a:solidFill>
-            <a:srgbClr val="17332F"/>
+            <a:srgbClr val="151A24"/>
           </a:solidFill>
           <a:ln w="12700">
             <a:solidFill>
@@ -3593,14 +4406,14 @@
       </p:sp>
       <p:sp>
         <p:nvSpPr>
-          <p:cNvPr id="16" name="Text 14"/>
-          <p:cNvSpPr/>
-          <p:nvPr/>
-        </p:nvSpPr>
-        <p:spPr>
-          <a:xfrm>
-            <a:off x="6825996" y="2057400"/>
-            <a:ext cx="4521708" cy="365760"/>
+          <p:cNvPr id="37" name="Text 35"/>
+          <p:cNvSpPr/>
+          <p:nvPr/>
+        </p:nvSpPr>
+        <p:spPr>
+          <a:xfrm>
+            <a:off x="6469380" y="1591056"/>
+            <a:ext cx="2921508" cy="292608"/>
           </a:xfrm>
           <a:prstGeom prst="rect">
             <a:avLst/>
@@ -3616,7 +4429,7 @@
               <a:buNone/>
             </a:pPr>
             <a:r>
-              <a:rPr lang="en-US" sz="2000" b="1" dirty="0">
+              <a:rPr lang="en-US" sz="1600" b="1" dirty="0">
                 <a:solidFill>
                   <a:srgbClr val="E7ECF3"/>
                 </a:solidFill>
@@ -3626,20 +4439,20 @@
               </a:rPr>
               <a:t>Manager · self-service</a:t>
             </a:r>
-            <a:endParaRPr lang="en-US" sz="2000" dirty="0"/>
-          </a:p>
-        </p:txBody>
-      </p:sp>
-      <p:sp>
-        <p:nvSpPr>
-          <p:cNvPr id="17" name="Text 15"/>
-          <p:cNvSpPr/>
-          <p:nvPr/>
-        </p:nvSpPr>
-        <p:spPr>
-          <a:xfrm>
-            <a:off x="6825996" y="2459736"/>
-            <a:ext cx="4521708" cy="274320"/>
+            <a:endParaRPr lang="en-US" sz="1600" dirty="0"/>
+          </a:p>
+        </p:txBody>
+      </p:sp>
+      <p:sp>
+        <p:nvSpPr>
+          <p:cNvPr id="38" name="Text 36"/>
+          <p:cNvSpPr/>
+          <p:nvPr/>
+        </p:nvSpPr>
+        <p:spPr>
+          <a:xfrm>
+            <a:off x="9153144" y="1600200"/>
+            <a:ext cx="2231136" cy="274320"/>
           </a:xfrm>
           <a:prstGeom prst="rect">
             <a:avLst/>
@@ -3651,50 +4464,153 @@
           <a:bodyPr wrap="square" lIns="0" tIns="0" rIns="0" bIns="0" rtlCol="0" anchor="ctr"/>
           <a:lstStyle/>
           <a:p>
+            <a:pPr algn="r" indent="0" marL="0">
+              <a:buNone/>
+            </a:pPr>
+            <a:r>
+              <a:rPr lang="en-US" sz="850" dirty="0">
+                <a:solidFill>
+                  <a:srgbClr val="3FC9BD"/>
+                </a:solidFill>
+                <a:latin typeface="Courier New" pitchFamily="34" charset="0"/>
+                <a:ea typeface="Courier New" pitchFamily="34" charset="-122"/>
+                <a:cs typeface="Courier New" pitchFamily="34" charset="-120"/>
+              </a:rPr>
+              <a:t>CSAM VM WAS · 5 locked</a:t>
+            </a:r>
+            <a:endParaRPr lang="en-US" sz="850" dirty="0"/>
+          </a:p>
+        </p:txBody>
+      </p:sp>
+      <p:sp>
+        <p:nvSpPr>
+          <p:cNvPr id="39" name="Shape 37"/>
+          <p:cNvSpPr/>
+          <p:nvPr/>
+        </p:nvSpPr>
+        <p:spPr>
+          <a:xfrm>
+            <a:off x="6469380" y="2039112"/>
+            <a:ext cx="182880" cy="182880"/>
+          </a:xfrm>
+          <a:prstGeom prst="ellipse">
+            <a:avLst/>
+          </a:prstGeom>
+          <a:solidFill>
+            <a:srgbClr val="2A3341"/>
+          </a:solidFill>
+          <a:ln w="12700">
+            <a:solidFill>
+              <a:srgbClr val="333333"/>
+            </a:solidFill>
+            <a:prstDash val="solid"/>
+          </a:ln>
+        </p:spPr>
+      </p:sp>
+      <p:sp>
+        <p:nvSpPr>
+          <p:cNvPr id="40" name="Text 38"/>
+          <p:cNvSpPr/>
+          <p:nvPr/>
+        </p:nvSpPr>
+        <p:spPr>
+          <a:xfrm>
+            <a:off x="6469380" y="2039112"/>
+            <a:ext cx="182880" cy="182880"/>
+          </a:xfrm>
+          <a:prstGeom prst="rect">
+            <a:avLst/>
+          </a:prstGeom>
+          <a:noFill/>
+          <a:ln/>
+        </p:spPr>
+        <p:txBody>
+          <a:bodyPr wrap="square" lIns="0" tIns="0" rIns="0" bIns="0" rtlCol="0" anchor="ctr"/>
+          <a:lstStyle/>
+          <a:p>
+            <a:pPr algn="ctr" indent="0" marL="0">
+              <a:buNone/>
+            </a:pPr>
+            <a:r>
+              <a:rPr lang="en-US" sz="750" dirty="0">
+                <a:solidFill>
+                  <a:srgbClr val="A3ADC0"/>
+                </a:solidFill>
+                <a:latin typeface="Courier New" pitchFamily="34" charset="0"/>
+                <a:ea typeface="Courier New" pitchFamily="34" charset="-122"/>
+                <a:cs typeface="Courier New" pitchFamily="34" charset="-120"/>
+              </a:rPr>
+              <a:t>1</a:t>
+            </a:r>
+            <a:endParaRPr lang="en-US" sz="750" dirty="0"/>
+          </a:p>
+        </p:txBody>
+      </p:sp>
+      <p:sp>
+        <p:nvSpPr>
+          <p:cNvPr id="41" name="Text 39"/>
+          <p:cNvSpPr/>
+          <p:nvPr/>
+        </p:nvSpPr>
+        <p:spPr>
+          <a:xfrm>
+            <a:off x="6725412" y="2011680"/>
+            <a:ext cx="4640580" cy="228600"/>
+          </a:xfrm>
+          <a:prstGeom prst="rect">
+            <a:avLst/>
+          </a:prstGeom>
+          <a:noFill/>
+          <a:ln/>
+        </p:spPr>
+        <p:txBody>
+          <a:bodyPr wrap="square" lIns="0" tIns="0" rIns="0" bIns="0" rtlCol="0" anchor="t"/>
+          <a:lstStyle/>
+          <a:p>
             <a:pPr indent="0" marL="0">
               <a:buNone/>
             </a:pPr>
             <a:r>
-              <a:rPr lang="en-US" sz="1250" i="1" dirty="0">
-                <a:solidFill>
-                  <a:srgbClr val="77839A"/>
+              <a:rPr lang="en-US" sz="1150" b="1" dirty="0">
+                <a:solidFill>
+                  <a:srgbClr val="E7ECF3"/>
                 </a:solidFill>
                 <a:latin typeface="Calibri" pitchFamily="34" charset="0"/>
                 <a:ea typeface="Calibri" pitchFamily="34" charset="-122"/>
                 <a:cs typeface="Calibri" pitchFamily="34" charset="-120"/>
               </a:rPr>
-              <a:t>“how risky is my team's estate?”</a:t>
-            </a:r>
-            <a:endParaRPr lang="en-US" sz="1250" dirty="0"/>
-          </a:p>
-        </p:txBody>
-      </p:sp>
-      <p:sp>
-        <p:nvSpPr>
-          <p:cNvPr id="18" name="Text 16"/>
-          <p:cNvSpPr/>
-          <p:nvPr/>
-        </p:nvSpPr>
-        <p:spPr>
-          <a:xfrm>
-            <a:off x="6825996" y="2898648"/>
-            <a:ext cx="1371600" cy="384048"/>
-          </a:xfrm>
-          <a:prstGeom prst="rect">
-            <a:avLst/>
-          </a:prstGeom>
-          <a:noFill/>
-          <a:ln/>
-        </p:spPr>
-        <p:txBody>
-          <a:bodyPr wrap="square" lIns="0" tIns="0" rIns="0" bIns="0" rtlCol="0" anchor="ctr"/>
+              <a:t>Switch profiles</a:t>
+            </a:r>
+            <a:endParaRPr lang="en-US" sz="1150" dirty="0"/>
+          </a:p>
+        </p:txBody>
+      </p:sp>
+      <p:sp>
+        <p:nvSpPr>
+          <p:cNvPr id="42" name="Text 40"/>
+          <p:cNvSpPr/>
+          <p:nvPr/>
+        </p:nvSpPr>
+        <p:spPr>
+          <a:xfrm>
+            <a:off x="6725412" y="2221992"/>
+            <a:ext cx="4640580" cy="219456"/>
+          </a:xfrm>
+          <a:prstGeom prst="rect">
+            <a:avLst/>
+          </a:prstGeom>
+          <a:noFill/>
+          <a:ln/>
+        </p:spPr>
+        <p:txBody>
+          <a:bodyPr wrap="square" lIns="0" tIns="0" rIns="0" bIns="0" rtlCol="0" anchor="t"/>
           <a:lstStyle/>
           <a:p>
             <a:pPr indent="0" marL="0">
               <a:buNone/>
             </a:pPr>
             <a:r>
-              <a:rPr lang="en-US" sz="950" dirty="0">
+              <a:rPr lang="en-US" sz="850" dirty="0">
                 <a:solidFill>
                   <a:srgbClr val="77839A"/>
                 </a:solidFill>
@@ -3702,22 +4618,47 @@
                 <a:ea typeface="Courier New" pitchFamily="34" charset="-122"/>
                 <a:cs typeface="Courier New" pitchFamily="34" charset="-120"/>
               </a:rPr>
-              <a:t>MODULES</a:t>
-            </a:r>
-            <a:endParaRPr lang="en-US" sz="950" dirty="0"/>
-          </a:p>
-        </p:txBody>
-      </p:sp>
-      <p:sp>
-        <p:nvSpPr>
-          <p:cNvPr id="19" name="Text 17"/>
-          <p:cNvSpPr/>
-          <p:nvPr/>
-        </p:nvSpPr>
-        <p:spPr>
-          <a:xfrm>
-            <a:off x="8243316" y="2898648"/>
-            <a:ext cx="3104388" cy="384048"/>
+              <a:t>POST /api/session {profile:"manager"}</a:t>
+            </a:r>
+            <a:endParaRPr lang="en-US" sz="850" dirty="0"/>
+          </a:p>
+        </p:txBody>
+      </p:sp>
+      <p:sp>
+        <p:nvSpPr>
+          <p:cNvPr id="43" name="Shape 41"/>
+          <p:cNvSpPr/>
+          <p:nvPr/>
+        </p:nvSpPr>
+        <p:spPr>
+          <a:xfrm>
+            <a:off x="6469380" y="2555748"/>
+            <a:ext cx="182880" cy="182880"/>
+          </a:xfrm>
+          <a:prstGeom prst="ellipse">
+            <a:avLst/>
+          </a:prstGeom>
+          <a:solidFill>
+            <a:srgbClr val="2A3341"/>
+          </a:solidFill>
+          <a:ln w="12700">
+            <a:solidFill>
+              <a:srgbClr val="333333"/>
+            </a:solidFill>
+            <a:prstDash val="solid"/>
+          </a:ln>
+        </p:spPr>
+      </p:sp>
+      <p:sp>
+        <p:nvSpPr>
+          <p:cNvPr id="44" name="Text 42"/>
+          <p:cNvSpPr/>
+          <p:nvPr/>
+        </p:nvSpPr>
+        <p:spPr>
+          <a:xfrm>
+            <a:off x="6469380" y="2555748"/>
+            <a:ext cx="182880" cy="182880"/>
           </a:xfrm>
           <a:prstGeom prst="rect">
             <a:avLst/>
@@ -3729,11 +4670,50 @@
           <a:bodyPr wrap="square" lIns="0" tIns="0" rIns="0" bIns="0" rtlCol="0" anchor="ctr"/>
           <a:lstStyle/>
           <a:p>
-            <a:pPr algn="r" indent="0" marL="0">
-              <a:buNone/>
-            </a:pPr>
-            <a:r>
-              <a:rPr lang="en-US" sz="1250" dirty="0">
+            <a:pPr algn="ctr" indent="0" marL="0">
+              <a:buNone/>
+            </a:pPr>
+            <a:r>
+              <a:rPr lang="en-US" sz="750" dirty="0">
+                <a:solidFill>
+                  <a:srgbClr val="A3ADC0"/>
+                </a:solidFill>
+                <a:latin typeface="Courier New" pitchFamily="34" charset="0"/>
+                <a:ea typeface="Courier New" pitchFamily="34" charset="-122"/>
+                <a:cs typeface="Courier New" pitchFamily="34" charset="-120"/>
+              </a:rPr>
+              <a:t>2</a:t>
+            </a:r>
+            <a:endParaRPr lang="en-US" sz="750" dirty="0"/>
+          </a:p>
+        </p:txBody>
+      </p:sp>
+      <p:sp>
+        <p:nvSpPr>
+          <p:cNvPr id="45" name="Text 43"/>
+          <p:cNvSpPr/>
+          <p:nvPr/>
+        </p:nvSpPr>
+        <p:spPr>
+          <a:xfrm>
+            <a:off x="6725412" y="2528316"/>
+            <a:ext cx="4640580" cy="228600"/>
+          </a:xfrm>
+          <a:prstGeom prst="rect">
+            <a:avLst/>
+          </a:prstGeom>
+          <a:noFill/>
+          <a:ln/>
+        </p:spPr>
+        <p:txBody>
+          <a:bodyPr wrap="square" lIns="0" tIns="0" rIns="0" bIns="0" rtlCol="0" anchor="t"/>
+          <a:lstStyle/>
+          <a:p>
+            <a:pPr indent="0" marL="0">
+              <a:buNone/>
+            </a:pPr>
+            <a:r>
+              <a:rPr lang="en-US" sz="1150" b="1" dirty="0">
                 <a:solidFill>
                   <a:srgbClr val="E7ECF3"/>
                 </a:solidFill>
@@ -3741,38 +4721,38 @@
                 <a:ea typeface="Calibri" pitchFamily="34" charset="-122"/>
                 <a:cs typeface="Calibri" pitchFamily="34" charset="-120"/>
               </a:rPr>
-              <a:t>CSAM, VM, WAS only</a:t>
-            </a:r>
-            <a:endParaRPr lang="en-US" sz="1250" dirty="0"/>
-          </a:p>
-        </p:txBody>
-      </p:sp>
-      <p:sp>
-        <p:nvSpPr>
-          <p:cNvPr id="20" name="Text 18"/>
-          <p:cNvSpPr/>
-          <p:nvPr/>
-        </p:nvSpPr>
-        <p:spPr>
-          <a:xfrm>
-            <a:off x="6825996" y="3429000"/>
-            <a:ext cx="1371600" cy="384048"/>
-          </a:xfrm>
-          <a:prstGeom prst="rect">
-            <a:avLst/>
-          </a:prstGeom>
-          <a:noFill/>
-          <a:ln/>
-        </p:spPr>
-        <p:txBody>
-          <a:bodyPr wrap="square" lIns="0" tIns="0" rIns="0" bIns="0" rtlCol="0" anchor="ctr"/>
+              <a:t>Workbench refreshes</a:t>
+            </a:r>
+            <a:endParaRPr lang="en-US" sz="1150" dirty="0"/>
+          </a:p>
+        </p:txBody>
+      </p:sp>
+      <p:sp>
+        <p:nvSpPr>
+          <p:cNvPr id="46" name="Text 44"/>
+          <p:cNvSpPr/>
+          <p:nvPr/>
+        </p:nvSpPr>
+        <p:spPr>
+          <a:xfrm>
+            <a:off x="6725412" y="2738628"/>
+            <a:ext cx="4640580" cy="219456"/>
+          </a:xfrm>
+          <a:prstGeom prst="rect">
+            <a:avLst/>
+          </a:prstGeom>
+          <a:noFill/>
+          <a:ln/>
+        </p:spPr>
+        <p:txBody>
+          <a:bodyPr wrap="square" lIns="0" tIns="0" rIns="0" bIns="0" rtlCol="0" anchor="t"/>
           <a:lstStyle/>
           <a:p>
             <a:pPr indent="0" marL="0">
               <a:buNone/>
             </a:pPr>
             <a:r>
-              <a:rPr lang="en-US" sz="950" dirty="0">
+              <a:rPr lang="en-US" sz="850" dirty="0">
                 <a:solidFill>
                   <a:srgbClr val="77839A"/>
                 </a:solidFill>
@@ -3780,22 +4760,47 @@
                 <a:ea typeface="Courier New" pitchFamily="34" charset="-122"/>
                 <a:cs typeface="Courier New" pitchFamily="34" charset="-120"/>
               </a:rPr>
-              <a:t>MODE</a:t>
-            </a:r>
-            <a:endParaRPr lang="en-US" sz="950" dirty="0"/>
-          </a:p>
-        </p:txBody>
-      </p:sp>
-      <p:sp>
-        <p:nvSpPr>
-          <p:cNvPr id="21" name="Text 19"/>
-          <p:cNvSpPr/>
-          <p:nvPr/>
-        </p:nvSpPr>
-        <p:spPr>
-          <a:xfrm>
-            <a:off x="8243316" y="3429000"/>
-            <a:ext cx="3104388" cy="384048"/>
+              <a:t>same scores — CSAM ranking stays open</a:t>
+            </a:r>
+            <a:endParaRPr lang="en-US" sz="850" dirty="0"/>
+          </a:p>
+        </p:txBody>
+      </p:sp>
+      <p:sp>
+        <p:nvSpPr>
+          <p:cNvPr id="47" name="Shape 45"/>
+          <p:cNvSpPr/>
+          <p:nvPr/>
+        </p:nvSpPr>
+        <p:spPr>
+          <a:xfrm>
+            <a:off x="6469380" y="3072384"/>
+            <a:ext cx="182880" cy="182880"/>
+          </a:xfrm>
+          <a:prstGeom prst="ellipse">
+            <a:avLst/>
+          </a:prstGeom>
+          <a:solidFill>
+            <a:srgbClr val="2A3341"/>
+          </a:solidFill>
+          <a:ln w="12700">
+            <a:solidFill>
+              <a:srgbClr val="333333"/>
+            </a:solidFill>
+            <a:prstDash val="solid"/>
+          </a:ln>
+        </p:spPr>
+      </p:sp>
+      <p:sp>
+        <p:nvSpPr>
+          <p:cNvPr id="48" name="Text 46"/>
+          <p:cNvSpPr/>
+          <p:nvPr/>
+        </p:nvSpPr>
+        <p:spPr>
+          <a:xfrm>
+            <a:off x="6469380" y="3072384"/>
+            <a:ext cx="182880" cy="182880"/>
           </a:xfrm>
           <a:prstGeom prst="rect">
             <a:avLst/>
@@ -3807,11 +4812,50 @@
           <a:bodyPr wrap="square" lIns="0" tIns="0" rIns="0" bIns="0" rtlCol="0" anchor="ctr"/>
           <a:lstStyle/>
           <a:p>
-            <a:pPr algn="r" indent="0" marL="0">
-              <a:buNone/>
-            </a:pPr>
-            <a:r>
-              <a:rPr lang="en-US" sz="1250" dirty="0">
+            <a:pPr algn="ctr" indent="0" marL="0">
+              <a:buNone/>
+            </a:pPr>
+            <a:r>
+              <a:rPr lang="en-US" sz="750" dirty="0">
+                <a:solidFill>
+                  <a:srgbClr val="A3ADC0"/>
+                </a:solidFill>
+                <a:latin typeface="Courier New" pitchFamily="34" charset="0"/>
+                <a:ea typeface="Courier New" pitchFamily="34" charset="-122"/>
+                <a:cs typeface="Courier New" pitchFamily="34" charset="-120"/>
+              </a:rPr>
+              <a:t>3</a:t>
+            </a:r>
+            <a:endParaRPr lang="en-US" sz="750" dirty="0"/>
+          </a:p>
+        </p:txBody>
+      </p:sp>
+      <p:sp>
+        <p:nvSpPr>
+          <p:cNvPr id="49" name="Text 47"/>
+          <p:cNvSpPr/>
+          <p:nvPr/>
+        </p:nvSpPr>
+        <p:spPr>
+          <a:xfrm>
+            <a:off x="6725412" y="3044952"/>
+            <a:ext cx="4640580" cy="228600"/>
+          </a:xfrm>
+          <a:prstGeom prst="rect">
+            <a:avLst/>
+          </a:prstGeom>
+          <a:noFill/>
+          <a:ln/>
+        </p:spPr>
+        <p:txBody>
+          <a:bodyPr wrap="square" lIns="0" tIns="0" rIns="0" bIns="0" rtlCol="0" anchor="t"/>
+          <a:lstStyle/>
+          <a:p>
+            <a:pPr indent="0" marL="0">
+              <a:buNone/>
+            </a:pPr>
+            <a:r>
+              <a:rPr lang="en-US" sz="1150" b="1" dirty="0">
                 <a:solidFill>
                   <a:srgbClr val="E7ECF3"/>
                 </a:solidFill>
@@ -3819,38 +4863,38 @@
                 <a:ea typeface="Calibri" pitchFamily="34" charset="-122"/>
                 <a:cs typeface="Calibri" pitchFamily="34" charset="-120"/>
               </a:rPr>
-              <a:t>Read-only (DENY_WRITE=1)</a:t>
-            </a:r>
-            <a:endParaRPr lang="en-US" sz="1250" dirty="0"/>
-          </a:p>
-        </p:txBody>
-      </p:sp>
-      <p:sp>
-        <p:nvSpPr>
-          <p:cNvPr id="22" name="Text 20"/>
-          <p:cNvSpPr/>
-          <p:nvPr/>
-        </p:nvSpPr>
-        <p:spPr>
-          <a:xfrm>
-            <a:off x="6825996" y="3959352"/>
-            <a:ext cx="1371600" cy="384048"/>
-          </a:xfrm>
-          <a:prstGeom prst="rect">
-            <a:avLst/>
-          </a:prstGeom>
-          <a:noFill/>
-          <a:ln/>
-        </p:spPr>
-        <p:txBody>
-          <a:bodyPr wrap="square" lIns="0" tIns="0" rIns="0" bIns="0" rtlCol="0" anchor="ctr"/>
+              <a:t>Expand the same asset</a:t>
+            </a:r>
+            <a:endParaRPr lang="en-US" sz="1150" dirty="0"/>
+          </a:p>
+        </p:txBody>
+      </p:sp>
+      <p:sp>
+        <p:nvSpPr>
+          <p:cNvPr id="50" name="Text 48"/>
+          <p:cNvSpPr/>
+          <p:nvPr/>
+        </p:nvSpPr>
+        <p:spPr>
+          <a:xfrm>
+            <a:off x="6725412" y="3255264"/>
+            <a:ext cx="4640580" cy="219456"/>
+          </a:xfrm>
+          <a:prstGeom prst="rect">
+            <a:avLst/>
+          </a:prstGeom>
+          <a:noFill/>
+          <a:ln/>
+        </p:spPr>
+        <p:txBody>
+          <a:bodyPr wrap="square" lIns="0" tIns="0" rIns="0" bIns="0" rtlCol="0" anchor="t"/>
           <a:lstStyle/>
           <a:p>
             <a:pPr indent="0" marL="0">
               <a:buNone/>
             </a:pPr>
             <a:r>
-              <a:rPr lang="en-US" sz="950" dirty="0">
+              <a:rPr lang="en-US" sz="850" dirty="0">
                 <a:solidFill>
                   <a:srgbClr val="77839A"/>
                 </a:solidFill>
@@ -3858,22 +4902,47 @@
                 <a:ea typeface="Courier New" pitchFamily="34" charset="-122"/>
                 <a:cs typeface="Courier New" pitchFamily="34" charset="-120"/>
               </a:rPr>
-              <a:t>EVIDENCE</a:t>
-            </a:r>
-            <a:endParaRPr lang="en-US" sz="950" dirty="0"/>
-          </a:p>
-        </p:txBody>
-      </p:sp>
-      <p:sp>
-        <p:nvSpPr>
-          <p:cNvPr id="23" name="Text 21"/>
-          <p:cNvSpPr/>
-          <p:nvPr/>
-        </p:nvSpPr>
-        <p:spPr>
-          <a:xfrm>
-            <a:off x="8243316" y="3959352"/>
-            <a:ext cx="3104388" cy="384048"/>
+              <a:t>GET /api/assets/…/evidence · 2/5 visible</a:t>
+            </a:r>
+            <a:endParaRPr lang="en-US" sz="850" dirty="0"/>
+          </a:p>
+        </p:txBody>
+      </p:sp>
+      <p:sp>
+        <p:nvSpPr>
+          <p:cNvPr id="51" name="Shape 49"/>
+          <p:cNvSpPr/>
+          <p:nvPr/>
+        </p:nvSpPr>
+        <p:spPr>
+          <a:xfrm>
+            <a:off x="6469380" y="3589020"/>
+            <a:ext cx="182880" cy="182880"/>
+          </a:xfrm>
+          <a:prstGeom prst="ellipse">
+            <a:avLst/>
+          </a:prstGeom>
+          <a:solidFill>
+            <a:srgbClr val="2A3341"/>
+          </a:solidFill>
+          <a:ln w="12700">
+            <a:solidFill>
+              <a:srgbClr val="333333"/>
+            </a:solidFill>
+            <a:prstDash val="solid"/>
+          </a:ln>
+        </p:spPr>
+      </p:sp>
+      <p:sp>
+        <p:nvSpPr>
+          <p:cNvPr id="52" name="Text 50"/>
+          <p:cNvSpPr/>
+          <p:nvPr/>
+        </p:nvSpPr>
+        <p:spPr>
+          <a:xfrm>
+            <a:off x="6469380" y="3589020"/>
+            <a:ext cx="182880" cy="182880"/>
           </a:xfrm>
           <a:prstGeom prst="rect">
             <a:avLst/>
@@ -3885,11 +4954,50 @@
           <a:bodyPr wrap="square" lIns="0" tIns="0" rIns="0" bIns="0" rtlCol="0" anchor="ctr"/>
           <a:lstStyle/>
           <a:p>
-            <a:pPr algn="r" indent="0" marL="0">
-              <a:buNone/>
-            </a:pPr>
-            <a:r>
-              <a:rPr lang="en-US" sz="1250" dirty="0">
+            <a:pPr algn="ctr" indent="0" marL="0">
+              <a:buNone/>
+            </a:pPr>
+            <a:r>
+              <a:rPr lang="en-US" sz="750" dirty="0">
+                <a:solidFill>
+                  <a:srgbClr val="A3ADC0"/>
+                </a:solidFill>
+                <a:latin typeface="Courier New" pitchFamily="34" charset="0"/>
+                <a:ea typeface="Courier New" pitchFamily="34" charset="-122"/>
+                <a:cs typeface="Courier New" pitchFamily="34" charset="-120"/>
+              </a:rPr>
+              <a:t>4</a:t>
+            </a:r>
+            <a:endParaRPr lang="en-US" sz="750" dirty="0"/>
+          </a:p>
+        </p:txBody>
+      </p:sp>
+      <p:sp>
+        <p:nvSpPr>
+          <p:cNvPr id="53" name="Text 51"/>
+          <p:cNvSpPr/>
+          <p:nvPr/>
+        </p:nvSpPr>
+        <p:spPr>
+          <a:xfrm>
+            <a:off x="6725412" y="3561588"/>
+            <a:ext cx="4640580" cy="228600"/>
+          </a:xfrm>
+          <a:prstGeom prst="rect">
+            <a:avLst/>
+          </a:prstGeom>
+          <a:noFill/>
+          <a:ln/>
+        </p:spPr>
+        <p:txBody>
+          <a:bodyPr wrap="square" lIns="0" tIns="0" rIns="0" bIns="0" rtlCol="0" anchor="t"/>
+          <a:lstStyle/>
+          <a:p>
+            <a:pPr indent="0" marL="0">
+              <a:buNone/>
+            </a:pPr>
+            <a:r>
+              <a:rPr lang="en-US" sz="1150" b="1" dirty="0">
                 <a:solidFill>
                   <a:srgbClr val="E7ECF3"/>
                 </a:solidFill>
@@ -3897,38 +5005,38 @@
                 <a:ea typeface="Calibri" pitchFamily="34" charset="-122"/>
                 <a:cs typeface="Calibri" pitchFamily="34" charset="-120"/>
               </a:rPr>
-              <a:t>Restricted modules hidden and labelled</a:t>
-            </a:r>
-            <a:endParaRPr lang="en-US" sz="1250" dirty="0"/>
-          </a:p>
-        </p:txBody>
-      </p:sp>
-      <p:sp>
-        <p:nvSpPr>
-          <p:cNvPr id="24" name="Text 22"/>
-          <p:cNvSpPr/>
-          <p:nvPr/>
-        </p:nvSpPr>
-        <p:spPr>
-          <a:xfrm>
-            <a:off x="6825996" y="4489704"/>
-            <a:ext cx="1371600" cy="384048"/>
-          </a:xfrm>
-          <a:prstGeom prst="rect">
-            <a:avLst/>
-          </a:prstGeom>
-          <a:noFill/>
-          <a:ln/>
-        </p:spPr>
-        <p:txBody>
-          <a:bodyPr wrap="square" lIns="0" tIns="0" rIns="0" bIns="0" rtlCol="0" anchor="ctr"/>
+              <a:t>Ask why it's risky</a:t>
+            </a:r>
+            <a:endParaRPr lang="en-US" sz="1150" dirty="0"/>
+          </a:p>
+        </p:txBody>
+      </p:sp>
+      <p:sp>
+        <p:nvSpPr>
+          <p:cNvPr id="54" name="Text 52"/>
+          <p:cNvSpPr/>
+          <p:nvPr/>
+        </p:nvSpPr>
+        <p:spPr>
+          <a:xfrm>
+            <a:off x="6725412" y="3771900"/>
+            <a:ext cx="4640580" cy="219456"/>
+          </a:xfrm>
+          <a:prstGeom prst="rect">
+            <a:avLst/>
+          </a:prstGeom>
+          <a:noFill/>
+          <a:ln/>
+        </p:spPr>
+        <p:txBody>
+          <a:bodyPr wrap="square" lIns="0" tIns="0" rIns="0" bIns="0" rtlCol="0" anchor="t"/>
           <a:lstStyle/>
           <a:p>
             <a:pPr indent="0" marL="0">
               <a:buNone/>
             </a:pPr>
             <a:r>
-              <a:rPr lang="en-US" sz="950" dirty="0">
+              <a:rPr lang="en-US" sz="850" dirty="0">
                 <a:solidFill>
                   <a:srgbClr val="77839A"/>
                 </a:solidFill>
@@ -3936,22 +5044,47 @@
                 <a:ea typeface="Courier New" pitchFamily="34" charset="-122"/>
                 <a:cs typeface="Courier New" pitchFamily="34" charset="-120"/>
               </a:rPr>
-              <a:t>AUDIT</a:t>
-            </a:r>
-            <a:endParaRPr lang="en-US" sz="950" dirty="0"/>
-          </a:p>
-        </p:txBody>
-      </p:sp>
-      <p:sp>
-        <p:nvSpPr>
-          <p:cNvPr id="25" name="Text 23"/>
-          <p:cNvSpPr/>
-          <p:nvPr/>
-        </p:nvSpPr>
-        <p:spPr>
-          <a:xfrm>
-            <a:off x="8243316" y="4489704"/>
-            <a:ext cx="3104388" cy="384048"/>
+              <a:t>POST /api/chat → module VM</a:t>
+            </a:r>
+            <a:endParaRPr lang="en-US" sz="850" dirty="0"/>
+          </a:p>
+        </p:txBody>
+      </p:sp>
+      <p:sp>
+        <p:nvSpPr>
+          <p:cNvPr id="55" name="Shape 53"/>
+          <p:cNvSpPr/>
+          <p:nvPr/>
+        </p:nvSpPr>
+        <p:spPr>
+          <a:xfrm>
+            <a:off x="6469380" y="4105656"/>
+            <a:ext cx="182880" cy="182880"/>
+          </a:xfrm>
+          <a:prstGeom prst="ellipse">
+            <a:avLst/>
+          </a:prstGeom>
+          <a:solidFill>
+            <a:srgbClr val="2A3341"/>
+          </a:solidFill>
+          <a:ln w="12700">
+            <a:solidFill>
+              <a:srgbClr val="333333"/>
+            </a:solidFill>
+            <a:prstDash val="solid"/>
+          </a:ln>
+        </p:spPr>
+      </p:sp>
+      <p:sp>
+        <p:nvSpPr>
+          <p:cNvPr id="56" name="Text 54"/>
+          <p:cNvSpPr/>
+          <p:nvPr/>
+        </p:nvSpPr>
+        <p:spPr>
+          <a:xfrm>
+            <a:off x="6469380" y="4105656"/>
+            <a:ext cx="182880" cy="182880"/>
           </a:xfrm>
           <a:prstGeom prst="rect">
             <a:avLst/>
@@ -3963,11 +5096,50 @@
           <a:bodyPr wrap="square" lIns="0" tIns="0" rIns="0" bIns="0" rtlCol="0" anchor="ctr"/>
           <a:lstStyle/>
           <a:p>
-            <a:pPr algn="r" indent="0" marL="0">
-              <a:buNone/>
-            </a:pPr>
-            <a:r>
-              <a:rPr lang="en-US" sz="1250" dirty="0">
+            <a:pPr algn="ctr" indent="0" marL="0">
+              <a:buNone/>
+            </a:pPr>
+            <a:r>
+              <a:rPr lang="en-US" sz="750" dirty="0">
+                <a:solidFill>
+                  <a:srgbClr val="A3ADC0"/>
+                </a:solidFill>
+                <a:latin typeface="Courier New" pitchFamily="34" charset="0"/>
+                <a:ea typeface="Courier New" pitchFamily="34" charset="-122"/>
+                <a:cs typeface="Courier New" pitchFamily="34" charset="-120"/>
+              </a:rPr>
+              <a:t>5</a:t>
+            </a:r>
+            <a:endParaRPr lang="en-US" sz="750" dirty="0"/>
+          </a:p>
+        </p:txBody>
+      </p:sp>
+      <p:sp>
+        <p:nvSpPr>
+          <p:cNvPr id="57" name="Text 55"/>
+          <p:cNvSpPr/>
+          <p:nvPr/>
+        </p:nvSpPr>
+        <p:spPr>
+          <a:xfrm>
+            <a:off x="6725412" y="4078224"/>
+            <a:ext cx="4640580" cy="228600"/>
+          </a:xfrm>
+          <a:prstGeom prst="rect">
+            <a:avLst/>
+          </a:prstGeom>
+          <a:noFill/>
+          <a:ln/>
+        </p:spPr>
+        <p:txBody>
+          <a:bodyPr wrap="square" lIns="0" tIns="0" rIns="0" bIns="0" rtlCol="0" anchor="t"/>
+          <a:lstStyle/>
+          <a:p>
+            <a:pPr indent="0" marL="0">
+              <a:buNone/>
+            </a:pPr>
+            <a:r>
+              <a:rPr lang="en-US" sz="1150" b="1" dirty="0">
                 <a:solidFill>
                   <a:srgbClr val="E7ECF3"/>
                 </a:solidFill>
@@ -3975,77 +5147,238 @@
                 <a:ea typeface="Calibri" pitchFamily="34" charset="-122"/>
                 <a:cs typeface="Calibri" pitchFamily="34" charset="-120"/>
               </a:rPr>
-              <a:t>Every call, JSONL</a:t>
-            </a:r>
-            <a:endParaRPr lang="en-US" sz="1250" dirty="0"/>
-          </a:p>
-        </p:txBody>
-      </p:sp>
-      <p:sp>
-        <p:nvSpPr>
-          <p:cNvPr id="26" name="Text 24"/>
-          <p:cNvSpPr/>
-          <p:nvPr/>
-        </p:nvSpPr>
-        <p:spPr>
-          <a:xfrm>
-            <a:off x="5637276" y="3136392"/>
-            <a:ext cx="914400" cy="731520"/>
-          </a:xfrm>
-          <a:prstGeom prst="rect">
-            <a:avLst/>
-          </a:prstGeom>
-          <a:noFill/>
-          <a:ln/>
-        </p:spPr>
-        <p:txBody>
-          <a:bodyPr wrap="square" lIns="0" tIns="0" rIns="0" bIns="0" rtlCol="0" anchor="ctr"/>
-          <a:lstStyle/>
-          <a:p>
-            <a:pPr algn="ctr" indent="0" marL="0">
-              <a:lnSpc>
-                <a:spcPts val="1300"/>
-              </a:lnSpc>
-              <a:buNone/>
-            </a:pPr>
-            <a:r>
-              <a:rPr lang="en-US" sz="900" spc="100" kern="0" dirty="0">
-                <a:solidFill>
-                  <a:srgbClr val="77839A"/>
+              <a:t>Ask about patches anyway</a:t>
+            </a:r>
+            <a:endParaRPr lang="en-US" sz="1150" dirty="0"/>
+          </a:p>
+        </p:txBody>
+      </p:sp>
+      <p:sp>
+        <p:nvSpPr>
+          <p:cNvPr id="58" name="Text 56"/>
+          <p:cNvSpPr/>
+          <p:nvPr/>
+        </p:nvSpPr>
+        <p:spPr>
+          <a:xfrm>
+            <a:off x="6725412" y="4288536"/>
+            <a:ext cx="4640580" cy="219456"/>
+          </a:xfrm>
+          <a:prstGeom prst="rect">
+            <a:avLst/>
+          </a:prstGeom>
+          <a:noFill/>
+          <a:ln/>
+        </p:spPr>
+        <p:txBody>
+          <a:bodyPr wrap="square" lIns="0" tIns="0" rIns="0" bIns="0" rtlCol="0" anchor="t"/>
+          <a:lstStyle/>
+          <a:p>
+            <a:pPr indent="0" marL="0">
+              <a:buNone/>
+            </a:pPr>
+            <a:r>
+              <a:rPr lang="en-US" sz="850" dirty="0">
+                <a:solidFill>
+                  <a:srgbClr val="E8654A"/>
                 </a:solidFill>
                 <a:latin typeface="Courier New" pitchFamily="34" charset="0"/>
                 <a:ea typeface="Courier New" pitchFamily="34" charset="-122"/>
                 <a:cs typeface="Courier New" pitchFamily="34" charset="-120"/>
               </a:rPr>
-              <a:t>SAME</a:t>
-            </a:r>
-            <a:endParaRPr lang="en-US" sz="900" dirty="0"/>
-          </a:p>
+              <a:t>POST /api/chat → module PM denied</a:t>
+            </a:r>
+            <a:endParaRPr lang="en-US" sz="850" dirty="0"/>
+          </a:p>
+        </p:txBody>
+      </p:sp>
+      <p:sp>
+        <p:nvSpPr>
+          <p:cNvPr id="59" name="Shape 57"/>
+          <p:cNvSpPr/>
+          <p:nvPr/>
+        </p:nvSpPr>
+        <p:spPr>
+          <a:xfrm>
+            <a:off x="6469380" y="4622292"/>
+            <a:ext cx="182880" cy="182880"/>
+          </a:xfrm>
+          <a:prstGeom prst="ellipse">
+            <a:avLst/>
+          </a:prstGeom>
+          <a:solidFill>
+            <a:srgbClr val="2A3341"/>
+          </a:solidFill>
+          <a:ln w="12700">
+            <a:solidFill>
+              <a:srgbClr val="333333"/>
+            </a:solidFill>
+            <a:prstDash val="solid"/>
+          </a:ln>
+        </p:spPr>
+      </p:sp>
+      <p:sp>
+        <p:nvSpPr>
+          <p:cNvPr id="60" name="Text 58"/>
+          <p:cNvSpPr/>
+          <p:nvPr/>
+        </p:nvSpPr>
+        <p:spPr>
+          <a:xfrm>
+            <a:off x="6469380" y="4622292"/>
+            <a:ext cx="182880" cy="182880"/>
+          </a:xfrm>
+          <a:prstGeom prst="rect">
+            <a:avLst/>
+          </a:prstGeom>
+          <a:noFill/>
+          <a:ln/>
+        </p:spPr>
+        <p:txBody>
+          <a:bodyPr wrap="square" lIns="0" tIns="0" rIns="0" bIns="0" rtlCol="0" anchor="ctr"/>
+          <a:lstStyle/>
           <a:p>
             <a:pPr algn="ctr" indent="0" marL="0">
-              <a:lnSpc>
-                <a:spcPts val="1300"/>
-              </a:lnSpc>
-              <a:buNone/>
-            </a:pPr>
-            <a:r>
-              <a:rPr lang="en-US" sz="900" spc="100" kern="0" dirty="0">
-                <a:solidFill>
-                  <a:srgbClr val="77839A"/>
+              <a:buNone/>
+            </a:pPr>
+            <a:r>
+              <a:rPr lang="en-US" sz="750" dirty="0">
+                <a:solidFill>
+                  <a:srgbClr val="A3ADC0"/>
                 </a:solidFill>
                 <a:latin typeface="Courier New" pitchFamily="34" charset="0"/>
                 <a:ea typeface="Courier New" pitchFamily="34" charset="-122"/>
                 <a:cs typeface="Courier New" pitchFamily="34" charset="-120"/>
               </a:rPr>
-              <a:t>COPILOT</a:t>
-            </a:r>
-            <a:endParaRPr lang="en-US" sz="900" dirty="0"/>
-          </a:p>
-        </p:txBody>
-      </p:sp>
-      <p:sp>
-        <p:nvSpPr>
-          <p:cNvPr id="27" name="Text 25"/>
+              <a:t>6</a:t>
+            </a:r>
+            <a:endParaRPr lang="en-US" sz="750" dirty="0"/>
+          </a:p>
+        </p:txBody>
+      </p:sp>
+      <p:sp>
+        <p:nvSpPr>
+          <p:cNvPr id="61" name="Text 59"/>
+          <p:cNvSpPr/>
+          <p:nvPr/>
+        </p:nvSpPr>
+        <p:spPr>
+          <a:xfrm>
+            <a:off x="6725412" y="4594860"/>
+            <a:ext cx="4640580" cy="228600"/>
+          </a:xfrm>
+          <a:prstGeom prst="rect">
+            <a:avLst/>
+          </a:prstGeom>
+          <a:noFill/>
+          <a:ln/>
+        </p:spPr>
+        <p:txBody>
+          <a:bodyPr wrap="square" lIns="0" tIns="0" rIns="0" bIns="0" rtlCol="0" anchor="t"/>
+          <a:lstStyle/>
+          <a:p>
+            <a:pPr indent="0" marL="0">
+              <a:buNone/>
+            </a:pPr>
+            <a:r>
+              <a:rPr lang="en-US" sz="1150" b="1" dirty="0">
+                <a:solidFill>
+                  <a:srgbClr val="E7ECF3"/>
+                </a:solidFill>
+                <a:latin typeface="Calibri" pitchFamily="34" charset="0"/>
+                <a:ea typeface="Calibri" pitchFamily="34" charset="-122"/>
+                <a:cs typeface="Calibri" pitchFamily="34" charset="-120"/>
+              </a:rPr>
+              <a:t>Open the audit log</a:t>
+            </a:r>
+            <a:endParaRPr lang="en-US" sz="1150" dirty="0"/>
+          </a:p>
+        </p:txBody>
+      </p:sp>
+      <p:sp>
+        <p:nvSpPr>
+          <p:cNvPr id="62" name="Text 60"/>
+          <p:cNvSpPr/>
+          <p:nvPr/>
+        </p:nvSpPr>
+        <p:spPr>
+          <a:xfrm>
+            <a:off x="6725412" y="4805172"/>
+            <a:ext cx="4640580" cy="219456"/>
+          </a:xfrm>
+          <a:prstGeom prst="rect">
+            <a:avLst/>
+          </a:prstGeom>
+          <a:noFill/>
+          <a:ln/>
+        </p:spPr>
+        <p:txBody>
+          <a:bodyPr wrap="square" lIns="0" tIns="0" rIns="0" bIns="0" rtlCol="0" anchor="t"/>
+          <a:lstStyle/>
+          <a:p>
+            <a:pPr indent="0" marL="0">
+              <a:buNone/>
+            </a:pPr>
+            <a:r>
+              <a:rPr lang="en-US" sz="850" dirty="0">
+                <a:solidFill>
+                  <a:srgbClr val="77839A"/>
+                </a:solidFill>
+                <a:latin typeface="Courier New" pitchFamily="34" charset="0"/>
+                <a:ea typeface="Courier New" pitchFamily="34" charset="-122"/>
+                <a:cs typeface="Courier New" pitchFamily="34" charset="-120"/>
+              </a:rPr>
+              <a:t>GET /api/audit · CSAM / VM / WAS only</a:t>
+            </a:r>
+            <a:endParaRPr lang="en-US" sz="850" dirty="0"/>
+          </a:p>
+        </p:txBody>
+      </p:sp>
+      <p:sp>
+        <p:nvSpPr>
+          <p:cNvPr id="63" name="Text 61"/>
+          <p:cNvSpPr/>
+          <p:nvPr/>
+        </p:nvSpPr>
+        <p:spPr>
+          <a:xfrm>
+            <a:off x="6469380" y="5166360"/>
+            <a:ext cx="4914900" cy="457200"/>
+          </a:xfrm>
+          <a:prstGeom prst="rect">
+            <a:avLst/>
+          </a:prstGeom>
+          <a:noFill/>
+          <a:ln/>
+        </p:spPr>
+        <p:txBody>
+          <a:bodyPr wrap="square" lIns="0" tIns="0" rIns="0" bIns="0" rtlCol="0" anchor="ctr"/>
+          <a:lstStyle/>
+          <a:p>
+            <a:pPr indent="0" marL="0">
+              <a:lnSpc>
+                <a:spcPts val="1400"/>
+              </a:lnSpc>
+              <a:buNone/>
+            </a:pPr>
+            <a:r>
+              <a:rPr lang="en-US" sz="1100" dirty="0">
+                <a:solidFill>
+                  <a:srgbClr val="A3ADC0"/>
+                </a:solidFill>
+                <a:latin typeface="Calibri" pitchFamily="34" charset="0"/>
+                <a:ea typeface="Calibri" pitchFamily="34" charset="-122"/>
+                <a:cs typeface="Calibri" pitchFamily="34" charset="-120"/>
+              </a:rPr>
+              <a:t>Leaves with enough visibility to self-serve — and a paper trail proving the boundary held.</a:t>
+            </a:r>
+            <a:endParaRPr lang="en-US" sz="1100" dirty="0"/>
+          </a:p>
+        </p:txBody>
+      </p:sp>
+      <p:sp>
+        <p:nvSpPr>
+          <p:cNvPr id="64" name="Text 62"/>
           <p:cNvSpPr/>
           <p:nvPr/>
         </p:nvSpPr>
@@ -4079,7 +5412,7 @@
                 <a:ea typeface="Calibri" pitchFamily="34" charset="-122"/>
                 <a:cs typeface="Calibri" pitchFamily="34" charset="-120"/>
               </a:rPr>
-              <a:t>Same copilot. Two products. The difference is two environment variables — which means segmentation costs a config change, not a roadmap.</a:t>
+              <a:t>The ranking is never restricted — only the supporting detail underneath it. A manager can see that an asset scores 96; they cannot see the compliance failure or the patch job behind it. That was a decision, not a limitation.</a:t>
             </a:r>
             <a:endParaRPr lang="en-US" sz="1100" dirty="0"/>
           </a:p>
@@ -4087,7 +5420,7 @@
       </p:sp>
       <p:sp>
         <p:nvSpPr>
-          <p:cNvPr id="28" name="Text 26"/>
+          <p:cNvPr id="65" name="Text 63"/>
           <p:cNvSpPr/>
           <p:nvPr/>
         </p:nvSpPr>
@@ -4118,7 +5451,7 @@
                 <a:ea typeface="Courier New" pitchFamily="34" charset="-122"/>
                 <a:cs typeface="Courier New" pitchFamily="34" charset="-120"/>
               </a:rPr>
-              <a:t>11 / 16</a:t>
+              <a:t>11 / 17</a:t>
             </a:r>
             <a:endParaRPr lang="en-US" sz="900" dirty="0"/>
           </a:p>
@@ -4164,7 +5497,7 @@
         </p:nvSpPr>
         <p:spPr>
           <a:xfrm>
-            <a:off x="566928" y="365760"/>
+            <a:off x="566928" y="384048"/>
             <a:ext cx="11055096" cy="219456"/>
           </a:xfrm>
           <a:prstGeom prst="rect">
@@ -4189,7 +5522,7 @@
                 <a:ea typeface="Courier New" pitchFamily="34" charset="-122"/>
                 <a:cs typeface="Courier New" pitchFamily="34" charset="-120"/>
               </a:rPr>
-              <a:t>THE SURFACE</a:t>
+              <a:t>PROOF</a:t>
             </a:r>
             <a:endParaRPr lang="en-US" sz="1000" dirty="0"/>
           </a:p>
@@ -4203,8 +5536,8 @@
         </p:nvSpPr>
         <p:spPr>
           <a:xfrm>
-            <a:off x="566928" y="621792"/>
-            <a:ext cx="11055096" cy="548640"/>
+            <a:off x="566928" y="658368"/>
+            <a:ext cx="11055096" cy="658368"/>
           </a:xfrm>
           <a:prstGeom prst="rect">
             <a:avLst/>
@@ -4220,7 +5553,7 @@
               <a:buNone/>
             </a:pPr>
             <a:r>
-              <a:rPr lang="en-US" sz="2700" b="1" dirty="0">
+              <a:rPr lang="en-US" sz="3000" b="1" dirty="0">
                 <a:solidFill>
                   <a:srgbClr val="E7ECF3"/>
                 </a:solidFill>
@@ -4228,50 +5561,521 @@
                 <a:ea typeface="Arial" pitchFamily="34" charset="-122"/>
                 <a:cs typeface="Arial" pitchFamily="34" charset="-120"/>
               </a:rPr>
-              <a:t>The whole product in one frame</a:t>
-            </a:r>
-            <a:endParaRPr lang="en-US" sz="2700" dirty="0"/>
-          </a:p>
-        </p:txBody>
-      </p:sp>
-      <p:pic>
-        <p:nvPicPr>
-          <p:cNvPr id="4" name="Image 0" descr="deck_img/A_default_analyst.jpg">    </p:cNvPr>
-          <p:cNvPicPr>
-            <a:picLocks noChangeAspect="1"/>
-          </p:cNvPicPr>
-          <p:nvPr/>
-        </p:nvPicPr>
-        <p:blipFill>
-          <a:blip r:embed="rId1"/>
-          <a:stretch>
-            <a:fillRect/>
-          </a:stretch>
-        </p:blipFill>
-        <p:spPr>
-          <a:xfrm>
-            <a:off x="3134814" y="1298448"/>
-            <a:ext cx="5919324" cy="3520440"/>
-          </a:xfrm>
-          <a:prstGeom prst="rect">
-            <a:avLst/>
-          </a:prstGeom>
-        </p:spPr>
-      </p:pic>
-      <p:sp>
-        <p:nvSpPr>
-          <p:cNvPr id="5" name="Shape 2"/>
-          <p:cNvSpPr/>
-          <p:nvPr/>
-        </p:nvSpPr>
-        <p:spPr>
-          <a:xfrm>
-            <a:off x="566928" y="5093208"/>
-            <a:ext cx="3931920" cy="1261872"/>
+              <a:t>The guardrail, executed</a:t>
+            </a:r>
+            <a:endParaRPr lang="en-US" sz="3000" dirty="0"/>
+          </a:p>
+        </p:txBody>
+      </p:sp>
+      <p:sp>
+        <p:nvSpPr>
+          <p:cNvPr id="4" name="Shape 2"/>
+          <p:cNvSpPr/>
+          <p:nvPr/>
+        </p:nvSpPr>
+        <p:spPr>
+          <a:xfrm>
+            <a:off x="566928" y="1444752"/>
+            <a:ext cx="6400800" cy="4864608"/>
           </a:xfrm>
           <a:prstGeom prst="roundRect">
             <a:avLst>
-              <a:gd name="adj" fmla="val 4348"/>
+              <a:gd name="adj" fmla="val 1128"/>
+            </a:avLst>
+          </a:prstGeom>
+          <a:solidFill>
+            <a:srgbClr val="151A24"/>
+          </a:solidFill>
+          <a:ln w="12700">
+            <a:solidFill>
+              <a:srgbClr val="2A3341"/>
+            </a:solidFill>
+            <a:prstDash val="solid"/>
+          </a:ln>
+        </p:spPr>
+      </p:sp>
+      <p:sp>
+        <p:nvSpPr>
+          <p:cNvPr id="5" name="Text 3"/>
+          <p:cNvSpPr/>
+          <p:nvPr/>
+        </p:nvSpPr>
+        <p:spPr>
+          <a:xfrm>
+            <a:off x="822960" y="1664208"/>
+            <a:ext cx="5888736" cy="224028"/>
+          </a:xfrm>
+          <a:prstGeom prst="rect">
+            <a:avLst/>
+          </a:prstGeom>
+          <a:noFill/>
+          <a:ln/>
+        </p:spPr>
+        <p:txBody>
+          <a:bodyPr wrap="square" lIns="0" tIns="0" rIns="0" bIns="0" rtlCol="0" anchor="t"/>
+          <a:lstStyle/>
+          <a:p>
+            <a:pPr indent="0" marL="0">
+              <a:buNone/>
+            </a:pPr>
+            <a:r>
+              <a:rPr lang="en-US" sz="1000" dirty="0">
+                <a:solidFill>
+                  <a:srgbClr val="E7ECF3"/>
+                </a:solidFill>
+                <a:latin typeface="Courier New" pitchFamily="34" charset="0"/>
+                <a:ea typeface="Courier New" pitchFamily="34" charset="-122"/>
+                <a:cs typeface="Courier New" pitchFamily="34" charset="-120"/>
+              </a:rPr>
+              <a:t>$ curl -X POST localhost:5050/api/qualys-cli \</a:t>
+            </a:r>
+            <a:endParaRPr lang="en-US" sz="1000" dirty="0"/>
+          </a:p>
+        </p:txBody>
+      </p:sp>
+      <p:sp>
+        <p:nvSpPr>
+          <p:cNvPr id="6" name="Text 4"/>
+          <p:cNvSpPr/>
+          <p:nvPr/>
+        </p:nvSpPr>
+        <p:spPr>
+          <a:xfrm>
+            <a:off x="822960" y="1888236"/>
+            <a:ext cx="5888736" cy="224028"/>
+          </a:xfrm>
+          <a:prstGeom prst="rect">
+            <a:avLst/>
+          </a:prstGeom>
+          <a:noFill/>
+          <a:ln/>
+        </p:spPr>
+        <p:txBody>
+          <a:bodyPr wrap="square" lIns="0" tIns="0" rIns="0" bIns="0" rtlCol="0" anchor="t"/>
+          <a:lstStyle/>
+          <a:p>
+            <a:pPr indent="0" marL="0">
+              <a:buNone/>
+            </a:pPr>
+            <a:r>
+              <a:rPr lang="en-US" sz="1000" dirty="0">
+                <a:solidFill>
+                  <a:srgbClr val="E7ECF3"/>
+                </a:solidFill>
+                <a:latin typeface="Courier New" pitchFamily="34" charset="0"/>
+                <a:ea typeface="Courier New" pitchFamily="34" charset="-122"/>
+                <a:cs typeface="Courier New" pitchFamily="34" charset="-120"/>
+              </a:rPr>
+              <a:t>    -d '{"command":"pm patch apply --job Q3-log4j-remediation"}'</a:t>
+            </a:r>
+            <a:endParaRPr lang="en-US" sz="1000" dirty="0"/>
+          </a:p>
+        </p:txBody>
+      </p:sp>
+      <p:sp>
+        <p:nvSpPr>
+          <p:cNvPr id="7" name="Text 5"/>
+          <p:cNvSpPr/>
+          <p:nvPr/>
+        </p:nvSpPr>
+        <p:spPr>
+          <a:xfrm>
+            <a:off x="822960" y="2336292"/>
+            <a:ext cx="5888736" cy="224028"/>
+          </a:xfrm>
+          <a:prstGeom prst="rect">
+            <a:avLst/>
+          </a:prstGeom>
+          <a:noFill/>
+          <a:ln/>
+        </p:spPr>
+        <p:txBody>
+          <a:bodyPr wrap="square" lIns="0" tIns="0" rIns="0" bIns="0" rtlCol="0" anchor="t"/>
+          <a:lstStyle/>
+          <a:p>
+            <a:pPr indent="0" marL="0">
+              <a:buNone/>
+            </a:pPr>
+            <a:r>
+              <a:rPr lang="en-US" sz="1000" b="1" dirty="0">
+                <a:solidFill>
+                  <a:srgbClr val="E8654A"/>
+                </a:solidFill>
+                <a:latin typeface="Courier New" pitchFamily="34" charset="0"/>
+                <a:ea typeface="Courier New" pitchFamily="34" charset="-122"/>
+                <a:cs typeface="Courier New" pitchFamily="34" charset="-120"/>
+              </a:rPr>
+              <a:t>HTTP/1.1 403 Forbidden</a:t>
+            </a:r>
+            <a:endParaRPr lang="en-US" sz="1000" dirty="0"/>
+          </a:p>
+        </p:txBody>
+      </p:sp>
+      <p:sp>
+        <p:nvSpPr>
+          <p:cNvPr id="8" name="Text 6"/>
+          <p:cNvSpPr/>
+          <p:nvPr/>
+        </p:nvSpPr>
+        <p:spPr>
+          <a:xfrm>
+            <a:off x="822960" y="2560320"/>
+            <a:ext cx="5888736" cy="224028"/>
+          </a:xfrm>
+          <a:prstGeom prst="rect">
+            <a:avLst/>
+          </a:prstGeom>
+          <a:noFill/>
+          <a:ln/>
+        </p:spPr>
+        <p:txBody>
+          <a:bodyPr wrap="square" lIns="0" tIns="0" rIns="0" bIns="0" rtlCol="0" anchor="t"/>
+          <a:lstStyle/>
+          <a:p>
+            <a:pPr indent="0" marL="0">
+              <a:buNone/>
+            </a:pPr>
+            <a:r>
+              <a:rPr lang="en-US" sz="1000" dirty="0">
+                <a:solidFill>
+                  <a:srgbClr val="A3ADC0"/>
+                </a:solidFill>
+                <a:latin typeface="Courier New" pitchFamily="34" charset="0"/>
+                <a:ea typeface="Courier New" pitchFamily="34" charset="-122"/>
+                <a:cs typeface="Courier New" pitchFamily="34" charset="-120"/>
+              </a:rPr>
+              <a:t>{</a:t>
+            </a:r>
+            <a:endParaRPr lang="en-US" sz="1000" dirty="0"/>
+          </a:p>
+        </p:txBody>
+      </p:sp>
+      <p:sp>
+        <p:nvSpPr>
+          <p:cNvPr id="9" name="Text 7"/>
+          <p:cNvSpPr/>
+          <p:nvPr/>
+        </p:nvSpPr>
+        <p:spPr>
+          <a:xfrm>
+            <a:off x="822960" y="2784348"/>
+            <a:ext cx="5888736" cy="224028"/>
+          </a:xfrm>
+          <a:prstGeom prst="rect">
+            <a:avLst/>
+          </a:prstGeom>
+          <a:noFill/>
+          <a:ln/>
+        </p:spPr>
+        <p:txBody>
+          <a:bodyPr wrap="square" lIns="0" tIns="0" rIns="0" bIns="0" rtlCol="0" anchor="t"/>
+          <a:lstStyle/>
+          <a:p>
+            <a:pPr indent="0" marL="0">
+              <a:buNone/>
+            </a:pPr>
+            <a:r>
+              <a:rPr lang="en-US" sz="1000" dirty="0">
+                <a:solidFill>
+                  <a:srgbClr val="A3ADC0"/>
+                </a:solidFill>
+                <a:latin typeface="Courier New" pitchFamily="34" charset="0"/>
+                <a:ea typeface="Courier New" pitchFamily="34" charset="-122"/>
+                <a:cs typeface="Courier New" pitchFamily="34" charset="-120"/>
+              </a:rPr>
+              <a:t>  "output": "blocked: 'pm patch apply ...' looks like a</a:t>
+            </a:r>
+            <a:endParaRPr lang="en-US" sz="1000" dirty="0"/>
+          </a:p>
+        </p:txBody>
+      </p:sp>
+      <p:sp>
+        <p:nvSpPr>
+          <p:cNvPr id="10" name="Text 8"/>
+          <p:cNvSpPr/>
+          <p:nvPr/>
+        </p:nvSpPr>
+        <p:spPr>
+          <a:xfrm>
+            <a:off x="822960" y="3008376"/>
+            <a:ext cx="5888736" cy="224028"/>
+          </a:xfrm>
+          <a:prstGeom prst="rect">
+            <a:avLst/>
+          </a:prstGeom>
+          <a:noFill/>
+          <a:ln/>
+        </p:spPr>
+        <p:txBody>
+          <a:bodyPr wrap="square" lIns="0" tIns="0" rIns="0" bIns="0" rtlCol="0" anchor="t"/>
+          <a:lstStyle/>
+          <a:p>
+            <a:pPr indent="0" marL="0">
+              <a:buNone/>
+            </a:pPr>
+            <a:r>
+              <a:rPr lang="en-US" sz="1000" dirty="0">
+                <a:solidFill>
+                  <a:srgbClr val="A3ADC0"/>
+                </a:solidFill>
+                <a:latin typeface="Courier New" pitchFamily="34" charset="0"/>
+                <a:ea typeface="Courier New" pitchFamily="34" charset="-122"/>
+                <a:cs typeface="Courier New" pitchFamily="34" charset="-120"/>
+              </a:rPr>
+              <a:t>    write operation and QUALYS_MCP_DENY_WRITE=1 is</a:t>
+            </a:r>
+            <a:endParaRPr lang="en-US" sz="1000" dirty="0"/>
+          </a:p>
+        </p:txBody>
+      </p:sp>
+      <p:sp>
+        <p:nvSpPr>
+          <p:cNvPr id="11" name="Text 9"/>
+          <p:cNvSpPr/>
+          <p:nvPr/>
+        </p:nvSpPr>
+        <p:spPr>
+          <a:xfrm>
+            <a:off x="822960" y="3232404"/>
+            <a:ext cx="5888736" cy="224028"/>
+          </a:xfrm>
+          <a:prstGeom prst="rect">
+            <a:avLst/>
+          </a:prstGeom>
+          <a:noFill/>
+          <a:ln/>
+        </p:spPr>
+        <p:txBody>
+          <a:bodyPr wrap="square" lIns="0" tIns="0" rIns="0" bIns="0" rtlCol="0" anchor="t"/>
+          <a:lstStyle/>
+          <a:p>
+            <a:pPr indent="0" marL="0">
+              <a:buNone/>
+            </a:pPr>
+            <a:r>
+              <a:rPr lang="en-US" sz="1000" dirty="0">
+                <a:solidFill>
+                  <a:srgbClr val="A3ADC0"/>
+                </a:solidFill>
+                <a:latin typeface="Courier New" pitchFamily="34" charset="0"/>
+                <a:ea typeface="Courier New" pitchFamily="34" charset="-122"/>
+                <a:cs typeface="Courier New" pitchFamily="34" charset="-120"/>
+              </a:rPr>
+              <a:t>    enforced for this session."</a:t>
+            </a:r>
+            <a:endParaRPr lang="en-US" sz="1000" dirty="0"/>
+          </a:p>
+        </p:txBody>
+      </p:sp>
+      <p:sp>
+        <p:nvSpPr>
+          <p:cNvPr id="12" name="Text 10"/>
+          <p:cNvSpPr/>
+          <p:nvPr/>
+        </p:nvSpPr>
+        <p:spPr>
+          <a:xfrm>
+            <a:off x="822960" y="3456432"/>
+            <a:ext cx="5888736" cy="224028"/>
+          </a:xfrm>
+          <a:prstGeom prst="rect">
+            <a:avLst/>
+          </a:prstGeom>
+          <a:noFill/>
+          <a:ln/>
+        </p:spPr>
+        <p:txBody>
+          <a:bodyPr wrap="square" lIns="0" tIns="0" rIns="0" bIns="0" rtlCol="0" anchor="t"/>
+          <a:lstStyle/>
+          <a:p>
+            <a:pPr indent="0" marL="0">
+              <a:buNone/>
+            </a:pPr>
+            <a:r>
+              <a:rPr lang="en-US" sz="1000" dirty="0">
+                <a:solidFill>
+                  <a:srgbClr val="A3ADC0"/>
+                </a:solidFill>
+                <a:latin typeface="Courier New" pitchFamily="34" charset="0"/>
+                <a:ea typeface="Courier New" pitchFamily="34" charset="-122"/>
+                <a:cs typeface="Courier New" pitchFamily="34" charset="-120"/>
+              </a:rPr>
+              <a:t>}</a:t>
+            </a:r>
+            <a:endParaRPr lang="en-US" sz="1000" dirty="0"/>
+          </a:p>
+        </p:txBody>
+      </p:sp>
+      <p:sp>
+        <p:nvSpPr>
+          <p:cNvPr id="13" name="Text 11"/>
+          <p:cNvSpPr/>
+          <p:nvPr/>
+        </p:nvSpPr>
+        <p:spPr>
+          <a:xfrm>
+            <a:off x="822960" y="3904488"/>
+            <a:ext cx="5888736" cy="224028"/>
+          </a:xfrm>
+          <a:prstGeom prst="rect">
+            <a:avLst/>
+          </a:prstGeom>
+          <a:noFill/>
+          <a:ln/>
+        </p:spPr>
+        <p:txBody>
+          <a:bodyPr wrap="square" lIns="0" tIns="0" rIns="0" bIns="0" rtlCol="0" anchor="t"/>
+          <a:lstStyle/>
+          <a:p>
+            <a:pPr indent="0" marL="0">
+              <a:buNone/>
+            </a:pPr>
+            <a:r>
+              <a:rPr lang="en-US" sz="1000" dirty="0">
+                <a:solidFill>
+                  <a:srgbClr val="3FC9BD"/>
+                </a:solidFill>
+                <a:latin typeface="Courier New" pitchFamily="34" charset="0"/>
+                <a:ea typeface="Courier New" pitchFamily="34" charset="-122"/>
+                <a:cs typeface="Courier New" pitchFamily="34" charset="-120"/>
+              </a:rPr>
+              <a:t># and in the audit log, one line later:</a:t>
+            </a:r>
+            <a:endParaRPr lang="en-US" sz="1000" dirty="0"/>
+          </a:p>
+        </p:txBody>
+      </p:sp>
+      <p:sp>
+        <p:nvSpPr>
+          <p:cNvPr id="14" name="Text 12"/>
+          <p:cNvSpPr/>
+          <p:nvPr/>
+        </p:nvSpPr>
+        <p:spPr>
+          <a:xfrm>
+            <a:off x="822960" y="4128516"/>
+            <a:ext cx="5888736" cy="224028"/>
+          </a:xfrm>
+          <a:prstGeom prst="rect">
+            <a:avLst/>
+          </a:prstGeom>
+          <a:noFill/>
+          <a:ln/>
+        </p:spPr>
+        <p:txBody>
+          <a:bodyPr wrap="square" lIns="0" tIns="0" rIns="0" bIns="0" rtlCol="0" anchor="t"/>
+          <a:lstStyle/>
+          <a:p>
+            <a:pPr indent="0" marL="0">
+              <a:buNone/>
+            </a:pPr>
+            <a:r>
+              <a:rPr lang="en-US" sz="1000" dirty="0">
+                <a:solidFill>
+                  <a:srgbClr val="A3ADC0"/>
+                </a:solidFill>
+                <a:latin typeface="Courier New" pitchFamily="34" charset="0"/>
+                <a:ea typeface="Courier New" pitchFamily="34" charset="-122"/>
+                <a:cs typeface="Courier New" pitchFamily="34" charset="-120"/>
+              </a:rPr>
+              <a:t>{"ts":"2026-07-14T07:17:18Z", "tool":"qualys_cli",</a:t>
+            </a:r>
+            <a:endParaRPr lang="en-US" sz="1000" dirty="0"/>
+          </a:p>
+        </p:txBody>
+      </p:sp>
+      <p:sp>
+        <p:nvSpPr>
+          <p:cNvPr id="15" name="Text 13"/>
+          <p:cNvSpPr/>
+          <p:nvPr/>
+        </p:nvSpPr>
+        <p:spPr>
+          <a:xfrm>
+            <a:off x="822960" y="4352544"/>
+            <a:ext cx="5888736" cy="224028"/>
+          </a:xfrm>
+          <a:prstGeom prst="rect">
+            <a:avLst/>
+          </a:prstGeom>
+          <a:noFill/>
+          <a:ln/>
+        </p:spPr>
+        <p:txBody>
+          <a:bodyPr wrap="square" lIns="0" tIns="0" rIns="0" bIns="0" rtlCol="0" anchor="t"/>
+          <a:lstStyle/>
+          <a:p>
+            <a:pPr indent="0" marL="0">
+              <a:buNone/>
+            </a:pPr>
+            <a:r>
+              <a:rPr lang="en-US" sz="1000" dirty="0">
+                <a:solidFill>
+                  <a:srgbClr val="A3ADC0"/>
+                </a:solidFill>
+                <a:latin typeface="Courier New" pitchFamily="34" charset="0"/>
+                <a:ea typeface="Courier New" pitchFamily="34" charset="-122"/>
+                <a:cs typeface="Courier New" pitchFamily="34" charset="-120"/>
+              </a:rPr>
+              <a:t> "module":"GENERIC", "mode":"read-only",</a:t>
+            </a:r>
+            <a:endParaRPr lang="en-US" sz="1000" dirty="0"/>
+          </a:p>
+        </p:txBody>
+      </p:sp>
+      <p:sp>
+        <p:nvSpPr>
+          <p:cNvPr id="16" name="Text 14"/>
+          <p:cNvSpPr/>
+          <p:nvPr/>
+        </p:nvSpPr>
+        <p:spPr>
+          <a:xfrm>
+            <a:off x="822960" y="4576572"/>
+            <a:ext cx="5888736" cy="224028"/>
+          </a:xfrm>
+          <a:prstGeom prst="rect">
+            <a:avLst/>
+          </a:prstGeom>
+          <a:noFill/>
+          <a:ln/>
+        </p:spPr>
+        <p:txBody>
+          <a:bodyPr wrap="square" lIns="0" tIns="0" rIns="0" bIns="0" rtlCol="0" anchor="t"/>
+          <a:lstStyle/>
+          <a:p>
+            <a:pPr indent="0" marL="0">
+              <a:buNone/>
+            </a:pPr>
+            <a:r>
+              <a:rPr lang="en-US" sz="1000" b="1" dirty="0">
+                <a:solidFill>
+                  <a:srgbClr val="E8654A"/>
+                </a:solidFill>
+                <a:latin typeface="Courier New" pitchFamily="34" charset="0"/>
+                <a:ea typeface="Courier New" pitchFamily="34" charset="-122"/>
+                <a:cs typeface="Courier New" pitchFamily="34" charset="-120"/>
+              </a:rPr>
+              <a:t> "result":"denied"}</a:t>
+            </a:r>
+            <a:endParaRPr lang="en-US" sz="1000" dirty="0"/>
+          </a:p>
+        </p:txBody>
+      </p:sp>
+      <p:sp>
+        <p:nvSpPr>
+          <p:cNvPr id="17" name="Shape 15"/>
+          <p:cNvSpPr/>
+          <p:nvPr/>
+        </p:nvSpPr>
+        <p:spPr>
+          <a:xfrm>
+            <a:off x="7424928" y="1444752"/>
+            <a:ext cx="4197096" cy="1234440"/>
+          </a:xfrm>
+          <a:prstGeom prst="roundRect">
+            <a:avLst>
+              <a:gd name="adj" fmla="val 4444"/>
             </a:avLst>
           </a:prstGeom>
           <a:solidFill>
@@ -4289,14 +6093,14 @@
       </p:sp>
       <p:sp>
         <p:nvSpPr>
-          <p:cNvPr id="6" name="Text 3"/>
-          <p:cNvSpPr/>
-          <p:nvPr/>
-        </p:nvSpPr>
-        <p:spPr>
-          <a:xfrm>
-            <a:off x="768096" y="5093208"/>
-            <a:ext cx="3529584" cy="1261872"/>
+          <p:cNvPr id="18" name="Text 16"/>
+          <p:cNvSpPr/>
+          <p:nvPr/>
+        </p:nvSpPr>
+        <p:spPr>
+          <a:xfrm>
+            <a:off x="7626096" y="1444752"/>
+            <a:ext cx="3794760" cy="1234440"/>
           </a:xfrm>
           <a:prstGeom prst="rect">
             <a:avLst/>
@@ -4323,7 +6127,7 @@
                 <a:ea typeface="Calibri" pitchFamily="34" charset="-122"/>
                 <a:cs typeface="Calibri" pitchFamily="34" charset="-120"/>
               </a:rPr>
-              <a:t>Conversation on the left. Ranked evidence on the right. The governance contract across the top.</a:t>
+              <a:t>I tried to make it do the wrong thing. The server said no — and then wrote down that I asked.</a:t>
             </a:r>
             <a:endParaRPr lang="en-US" sz="1250" dirty="0"/>
           </a:p>
@@ -4331,23 +6135,23 @@
       </p:sp>
       <p:sp>
         <p:nvSpPr>
-          <p:cNvPr id="7" name="Text 4"/>
-          <p:cNvSpPr/>
-          <p:nvPr/>
-        </p:nvSpPr>
-        <p:spPr>
-          <a:xfrm>
-            <a:off x="4791456" y="5093208"/>
-            <a:ext cx="6830568" cy="1261872"/>
-          </a:xfrm>
-          <a:prstGeom prst="rect">
-            <a:avLst/>
-          </a:prstGeom>
-          <a:noFill/>
-          <a:ln/>
-        </p:spPr>
-        <p:txBody>
-          <a:bodyPr wrap="square" lIns="0" tIns="0" rIns="0" bIns="0" rtlCol="0" anchor="ctr"/>
+          <p:cNvPr id="19" name="Text 17"/>
+          <p:cNvSpPr/>
+          <p:nvPr/>
+        </p:nvSpPr>
+        <p:spPr>
+          <a:xfrm>
+            <a:off x="7424928" y="2907792"/>
+            <a:ext cx="4197096" cy="3401568"/>
+          </a:xfrm>
+          <a:prstGeom prst="rect">
+            <a:avLst/>
+          </a:prstGeom>
+          <a:noFill/>
+          <a:ln/>
+        </p:spPr>
+        <p:txBody>
+          <a:bodyPr wrap="square" lIns="0" tIns="0" rIns="0" bIns="0" rtlCol="0" anchor="t"/>
           <a:lstStyle/>
           <a:p>
             <a:pPr marL="342900" indent="-342900">
@@ -4355,7 +6159,7 @@
                 <a:spcPts val="1600"/>
               </a:lnSpc>
               <a:spcAft>
-                <a:spcPts val="600"/>
+                <a:spcPts val="800"/>
               </a:spcAft>
               <a:buSzPct val="100000"/>
               <a:buChar char="•"/>
@@ -4369,7 +6173,7 @@
                 <a:ea typeface="Calibri" pitchFamily="34" charset="-122"/>
                 <a:cs typeface="Calibri" pitchFamily="34" charset="-120"/>
               </a:rPr>
-              <a:t>The header states the contract before you ask anything: read-only, 8 of 8 modules in scope, 4 audited calls so far.</a:t>
+              <a:t>The model did not refuse. The server refused. That is the difference between a control and a hope.</a:t>
             </a:r>
             <a:endParaRPr lang="en-US" sz="1200" dirty="0"/>
           </a:p>
@@ -4379,7 +6183,7 @@
                 <a:spcPts val="1600"/>
               </a:lnSpc>
               <a:spcAft>
-                <a:spcPts val="600"/>
+                <a:spcPts val="800"/>
               </a:spcAft>
               <a:buSzPct val="100000"/>
               <a:buChar char="•"/>
@@ -4393,15 +6197,39 @@
                 <a:ea typeface="Calibri" pitchFamily="34" charset="-122"/>
                 <a:cs typeface="Calibri" pitchFamily="34" charset="-120"/>
               </a:rPr>
-              <a:t>Chat is for exploring. The workbench is where you act.</a:t>
+              <a:t>DENY_WRITE applies to every profile, including the Analyst's — there is no privileged path around it.</a:t>
             </a:r>
             <a:endParaRPr lang="en-US" sz="1200" dirty="0"/>
           </a:p>
-        </p:txBody>
-      </p:sp>
-      <p:sp>
-        <p:nvSpPr>
-          <p:cNvPr id="8" name="Text 5"/>
+          <a:p>
+            <a:pPr marL="342900" indent="-342900">
+              <a:lnSpc>
+                <a:spcPts val="1600"/>
+              </a:lnSpc>
+              <a:spcAft>
+                <a:spcPts val="800"/>
+              </a:spcAft>
+              <a:buSzPct val="100000"/>
+              <a:buChar char="•"/>
+            </a:pPr>
+            <a:r>
+              <a:rPr lang="en-US" sz="1200" dirty="0">
+                <a:solidFill>
+                  <a:srgbClr val="A3ADC0"/>
+                </a:solidFill>
+                <a:latin typeface="Calibri" pitchFamily="34" charset="0"/>
+                <a:ea typeface="Calibri" pitchFamily="34" charset="-122"/>
+                <a:cs typeface="Calibri" pitchFamily="34" charset="-120"/>
+              </a:rPr>
+              <a:t>The denial is audited, not just blocked. An auditor can see what was attempted, not only what succeeded.</a:t>
+            </a:r>
+            <a:endParaRPr lang="en-US" sz="1200" dirty="0"/>
+          </a:p>
+        </p:txBody>
+      </p:sp>
+      <p:sp>
+        <p:nvSpPr>
+          <p:cNvPr id="20" name="Text 18"/>
           <p:cNvSpPr/>
           <p:nvPr/>
         </p:nvSpPr>
@@ -4432,7 +6260,7 @@
                 <a:ea typeface="Courier New" pitchFamily="34" charset="-122"/>
                 <a:cs typeface="Courier New" pitchFamily="34" charset="-120"/>
               </a:rPr>
-              <a:t>12 / 16</a:t>
+              <a:t>12 / 17</a:t>
             </a:r>
             <a:endParaRPr lang="en-US" sz="900" dirty="0"/>
           </a:p>
@@ -4542,7 +6370,7 @@
                 <a:ea typeface="Arial" pitchFamily="34" charset="-122"/>
                 <a:cs typeface="Arial" pitchFamily="34" charset="-120"/>
               </a:rPr>
-              <a:t>One asset. Five modules. One story.</a:t>
+              <a:t>The whole product in one frame</a:t>
             </a:r>
             <a:endParaRPr lang="en-US" sz="2700" dirty="0"/>
           </a:p>
@@ -4550,7 +6378,7 @@
       </p:sp>
       <p:pic>
         <p:nvPicPr>
-          <p:cNvPr id="4" name="Image 0" descr="deck_img/C_workbench_panel.jpg">    </p:cNvPr>
+          <p:cNvPr id="4" name="Image 0" descr="deck_img/A_analyst_default.jpg">    </p:cNvPr>
           <p:cNvPicPr>
             <a:picLocks noChangeAspect="1"/>
           </p:cNvPicPr>
@@ -4564,8 +6392,8 @@
         </p:blipFill>
         <p:spPr>
           <a:xfrm>
-            <a:off x="6592824" y="1431574"/>
-            <a:ext cx="5029200" cy="4360612"/>
+            <a:off x="3134814" y="1298448"/>
+            <a:ext cx="5919324" cy="3520440"/>
           </a:xfrm>
           <a:prstGeom prst="rect">
             <a:avLst/>
@@ -4580,12 +6408,12 @@
         </p:nvSpPr>
         <p:spPr>
           <a:xfrm>
-            <a:off x="566928" y="1417320"/>
-            <a:ext cx="5568696" cy="1143000"/>
+            <a:off x="566928" y="5093208"/>
+            <a:ext cx="3931920" cy="1261872"/>
           </a:xfrm>
           <a:prstGeom prst="roundRect">
             <a:avLst>
-              <a:gd name="adj" fmla="val 4800"/>
+              <a:gd name="adj" fmla="val 4348"/>
             </a:avLst>
           </a:prstGeom>
           <a:solidFill>
@@ -4609,8 +6437,8 @@
         </p:nvSpPr>
         <p:spPr>
           <a:xfrm>
-            <a:off x="768096" y="1417320"/>
-            <a:ext cx="5166360" cy="1143000"/>
+            <a:off x="768096" y="5093208"/>
+            <a:ext cx="3529584" cy="1261872"/>
           </a:xfrm>
           <a:prstGeom prst="rect">
             <a:avLst/>
@@ -4637,7 +6465,7 @@
                 <a:ea typeface="Calibri" pitchFamily="34" charset="-122"/>
                 <a:cs typeface="Calibri" pitchFamily="34" charset="-120"/>
               </a:rPr>
-              <a:t>Expand prod-checkout-web-01 (TruRisk 96) and the cross-module chain unfolds in place.</a:t>
+              <a:t>Conversation on the left. Ranked evidence on the right. The governance contract across the top.</a:t>
             </a:r>
             <a:endParaRPr lang="en-US" sz="1250" dirty="0"/>
           </a:p>
@@ -4651,17 +6479,17 @@
         </p:nvSpPr>
         <p:spPr>
           <a:xfrm>
-            <a:off x="566928" y="2743200"/>
-            <a:ext cx="5568696" cy="3108960"/>
-          </a:xfrm>
-          <a:prstGeom prst="rect">
-            <a:avLst/>
-          </a:prstGeom>
-          <a:noFill/>
-          <a:ln/>
-        </p:spPr>
-        <p:txBody>
-          <a:bodyPr wrap="square" lIns="0" tIns="0" rIns="0" bIns="0" rtlCol="0" anchor="t"/>
+            <a:off x="4791456" y="5093208"/>
+            <a:ext cx="6830568" cy="1261872"/>
+          </a:xfrm>
+          <a:prstGeom prst="rect">
+            <a:avLst/>
+          </a:prstGeom>
+          <a:noFill/>
+          <a:ln/>
+        </p:spPr>
+        <p:txBody>
+          <a:bodyPr wrap="square" lIns="0" tIns="0" rIns="0" bIns="0" rtlCol="0" anchor="ctr"/>
           <a:lstStyle/>
           <a:p>
             <a:pPr marL="342900" indent="-342900">
@@ -4669,7 +6497,7 @@
                 <a:spcPts val="1600"/>
               </a:lnSpc>
               <a:spcAft>
-                <a:spcPts val="800"/>
+                <a:spcPts val="600"/>
               </a:spcAft>
               <a:buSzPct val="100000"/>
               <a:buChar char="•"/>
@@ -4683,7 +6511,7 @@
                 <a:ea typeface="Calibri" pitchFamily="34" charset="-122"/>
                 <a:cs typeface="Calibri" pitchFamily="34" charset="-120"/>
               </a:rPr>
-              <a:t>VM — Log4Shell, CVSS 10.0, KB confirms active exploitation.</a:t>
+              <a:t>The header states the contract before you ask anything: read-only, 8 of 8 modules in scope, and a live audit counter.</a:t>
             </a:r>
             <a:endParaRPr lang="en-US" sz="1200" dirty="0"/>
           </a:p>
@@ -4693,7 +6521,7 @@
                 <a:spcPts val="1600"/>
               </a:lnSpc>
               <a:spcAft>
-                <a:spcPts val="800"/>
+                <a:spcPts val="600"/>
               </a:spcAft>
               <a:buSzPct val="100000"/>
               <a:buChar char="•"/>
@@ -4707,79 +6535,7 @@
                 <a:ea typeface="Calibri" pitchFamily="34" charset="-122"/>
                 <a:cs typeface="Calibri" pitchFamily="34" charset="-120"/>
               </a:rPr>
-              <a:t>WAS — reflected SQL injection on /checkout/apply-promo.</a:t>
-            </a:r>
-            <a:endParaRPr lang="en-US" sz="1200" dirty="0"/>
-          </a:p>
-          <a:p>
-            <a:pPr marL="342900" indent="-342900">
-              <a:lnSpc>
-                <a:spcPts val="1600"/>
-              </a:lnSpc>
-              <a:spcAft>
-                <a:spcPts val="800"/>
-              </a:spcAft>
-              <a:buSzPct val="100000"/>
-              <a:buChar char="•"/>
-            </a:pPr>
-            <a:r>
-              <a:rPr lang="en-US" sz="1200" dirty="0">
-                <a:solidFill>
-                  <a:srgbClr val="A3ADC0"/>
-                </a:solidFill>
-                <a:latin typeface="Calibri" pitchFamily="34" charset="0"/>
-                <a:ea typeface="Calibri" pitchFamily="34" charset="-122"/>
-                <a:cs typeface="Calibri" pitchFamily="34" charset="-120"/>
-              </a:rPr>
-              <a:t>PC — fails CIS 5.2.9, SSH root login is enabled.</a:t>
-            </a:r>
-            <a:endParaRPr lang="en-US" sz="1200" dirty="0"/>
-          </a:p>
-          <a:p>
-            <a:pPr marL="342900" indent="-342900">
-              <a:lnSpc>
-                <a:spcPts val="1600"/>
-              </a:lnSpc>
-              <a:spcAft>
-                <a:spcPts val="800"/>
-              </a:spcAft>
-              <a:buSzPct val="100000"/>
-              <a:buChar char="•"/>
-            </a:pPr>
-            <a:r>
-              <a:rPr lang="en-US" sz="1200" dirty="0">
-                <a:solidFill>
-                  <a:srgbClr val="A3ADC0"/>
-                </a:solidFill>
-                <a:latin typeface="Calibri" pitchFamily="34" charset="0"/>
-                <a:ea typeface="Calibri" pitchFamily="34" charset="-122"/>
-                <a:cs typeface="Calibri" pitchFamily="34" charset="-120"/>
-              </a:rPr>
-              <a:t>CA — agent healthy, so this score can be trusted.</a:t>
-            </a:r>
-            <a:endParaRPr lang="en-US" sz="1200" dirty="0"/>
-          </a:p>
-          <a:p>
-            <a:pPr marL="342900" indent="-342900">
-              <a:lnSpc>
-                <a:spcPts val="1600"/>
-              </a:lnSpc>
-              <a:spcAft>
-                <a:spcPts val="800"/>
-              </a:spcAft>
-              <a:buSzPct val="100000"/>
-              <a:buChar char="•"/>
-            </a:pPr>
-            <a:r>
-              <a:rPr lang="en-US" sz="1200" dirty="0">
-                <a:solidFill>
-                  <a:srgbClr val="A3ADC0"/>
-                </a:solidFill>
-                <a:latin typeface="Calibri" pitchFamily="34" charset="0"/>
-                <a:ea typeface="Calibri" pitchFamily="34" charset="-122"/>
-                <a:cs typeface="Calibri" pitchFamily="34" charset="-120"/>
-              </a:rPr>
-              <a:t>PM — a remediation job exists and has not run. Expedite it.</a:t>
+              <a:t>This is a running app — a Node server enforcing the policy, not a styled mockup.</a:t>
             </a:r>
             <a:endParaRPr lang="en-US" sz="1200" dirty="0"/>
           </a:p>
@@ -4818,7 +6574,7 @@
                 <a:ea typeface="Courier New" pitchFamily="34" charset="-122"/>
                 <a:cs typeface="Courier New" pitchFamily="34" charset="-120"/>
               </a:rPr>
-              <a:t>13 / 16</a:t>
+              <a:t>13 / 17</a:t>
             </a:r>
             <a:endParaRPr lang="en-US" sz="900" dirty="0"/>
           </a:p>
@@ -4928,7 +6684,7 @@
                 <a:ea typeface="Arial" pitchFamily="34" charset="-122"/>
                 <a:cs typeface="Arial" pitchFamily="34" charset="-120"/>
               </a:rPr>
-              <a:t>The evidence trail</a:t>
+              <a:t>One asset. Five modules. One story.</a:t>
             </a:r>
             <a:endParaRPr lang="en-US" sz="2700" dirty="0"/>
           </a:p>
@@ -4936,7 +6692,7 @@
       </p:sp>
       <p:pic>
         <p:nvPicPr>
-          <p:cNvPr id="4" name="Image 0" descr="deck_img/D_audit_drawer.jpg">    </p:cNvPr>
+          <p:cNvPr id="4" name="Image 0" descr="deck_img/C_analyst_evidence_5of5.jpg">    </p:cNvPr>
           <p:cNvPicPr>
             <a:picLocks noChangeAspect="1"/>
           </p:cNvPicPr>
@@ -4950,8 +6706,8 @@
         </p:blipFill>
         <p:spPr>
           <a:xfrm>
-            <a:off x="7838440" y="1371600"/>
-            <a:ext cx="3783584" cy="4480560"/>
+            <a:off x="3134814" y="1298448"/>
+            <a:ext cx="5919324" cy="3520440"/>
           </a:xfrm>
           <a:prstGeom prst="rect">
             <a:avLst/>
@@ -4966,12 +6722,12 @@
         </p:nvSpPr>
         <p:spPr>
           <a:xfrm>
-            <a:off x="566928" y="1417320"/>
-            <a:ext cx="6814312" cy="1143000"/>
+            <a:off x="566928" y="5093208"/>
+            <a:ext cx="3931920" cy="1261872"/>
           </a:xfrm>
           <a:prstGeom prst="roundRect">
             <a:avLst>
-              <a:gd name="adj" fmla="val 4800"/>
+              <a:gd name="adj" fmla="val 4348"/>
             </a:avLst>
           </a:prstGeom>
           <a:solidFill>
@@ -4995,8 +6751,8 @@
         </p:nvSpPr>
         <p:spPr>
           <a:xfrm>
-            <a:off x="768096" y="1417320"/>
-            <a:ext cx="6411976" cy="1143000"/>
+            <a:off x="768096" y="5093208"/>
+            <a:ext cx="3529584" cy="1261872"/>
           </a:xfrm>
           <a:prstGeom prst="rect">
             <a:avLst/>
@@ -5023,7 +6779,7 @@
                 <a:ea typeface="Calibri" pitchFamily="34" charset="-122"/>
                 <a:cs typeface="Calibri" pitchFamily="34" charset="-120"/>
               </a:rPr>
-              <a:t>Append-only JSONL: timestamp, tool, module, actor, mode. Written for every call, by default.</a:t>
+              <a:t>Expand prod-checkout-web-01 (TruRisk 96) and all five evidence cards render — 5/5 visible, because every module they live in is inside the Analyst allowlist.</a:t>
             </a:r>
             <a:endParaRPr lang="en-US" sz="1250" dirty="0"/>
           </a:p>
@@ -5037,17 +6793,17 @@
         </p:nvSpPr>
         <p:spPr>
           <a:xfrm>
-            <a:off x="566928" y="2743200"/>
-            <a:ext cx="6814312" cy="3108960"/>
-          </a:xfrm>
-          <a:prstGeom prst="rect">
-            <a:avLst/>
-          </a:prstGeom>
-          <a:noFill/>
-          <a:ln/>
-        </p:spPr>
-        <p:txBody>
-          <a:bodyPr wrap="square" lIns="0" tIns="0" rIns="0" bIns="0" rtlCol="0" anchor="t"/>
+            <a:off x="4791456" y="5093208"/>
+            <a:ext cx="6830568" cy="1261872"/>
+          </a:xfrm>
+          <a:prstGeom prst="rect">
+            <a:avLst/>
+          </a:prstGeom>
+          <a:noFill/>
+          <a:ln/>
+        </p:spPr>
+        <p:txBody>
+          <a:bodyPr wrap="square" lIns="0" tIns="0" rIns="0" bIns="0" rtlCol="0" anchor="ctr"/>
           <a:lstStyle/>
           <a:p>
             <a:pPr marL="342900" indent="-342900">
@@ -5055,7 +6811,7 @@
                 <a:spcPts val="1600"/>
               </a:lnSpc>
               <a:spcAft>
-                <a:spcPts val="800"/>
+                <a:spcPts val="600"/>
               </a:spcAft>
               <a:buSzPct val="100000"/>
               <a:buChar char="•"/>
@@ -5069,7 +6825,7 @@
                 <a:ea typeface="Calibri" pitchFamily="34" charset="-122"/>
                 <a:cs typeface="Calibri" pitchFamily="34" charset="-120"/>
               </a:rPr>
-              <a:t>The weekly report stops being a spreadsheet and becomes a reproducible artefact.</a:t>
+              <a:t>VM — Log4Shell, CVSS 10.0, KB confirms active exploitation.</a:t>
             </a:r>
             <a:endParaRPr lang="en-US" sz="1200" dirty="0"/>
           </a:p>
@@ -5079,7 +6835,7 @@
                 <a:spcPts val="1600"/>
               </a:lnSpc>
               <a:spcAft>
-                <a:spcPts val="800"/>
+                <a:spcPts val="600"/>
               </a:spcAft>
               <a:buSzPct val="100000"/>
               <a:buChar char="•"/>
@@ -5093,7 +6849,79 @@
                 <a:ea typeface="Calibri" pitchFamily="34" charset="-122"/>
                 <a:cs typeface="Calibri" pitchFamily="34" charset="-120"/>
               </a:rPr>
-              <a:t>This is the panel that turns a demo into something a CISO can sign.</a:t>
+              <a:t>WAS — reflected SQL injection on /checkout/apply-promo.</a:t>
+            </a:r>
+            <a:endParaRPr lang="en-US" sz="1200" dirty="0"/>
+          </a:p>
+          <a:p>
+            <a:pPr marL="342900" indent="-342900">
+              <a:lnSpc>
+                <a:spcPts val="1600"/>
+              </a:lnSpc>
+              <a:spcAft>
+                <a:spcPts val="600"/>
+              </a:spcAft>
+              <a:buSzPct val="100000"/>
+              <a:buChar char="•"/>
+            </a:pPr>
+            <a:r>
+              <a:rPr lang="en-US" sz="1200" dirty="0">
+                <a:solidFill>
+                  <a:srgbClr val="A3ADC0"/>
+                </a:solidFill>
+                <a:latin typeface="Calibri" pitchFamily="34" charset="0"/>
+                <a:ea typeface="Calibri" pitchFamily="34" charset="-122"/>
+                <a:cs typeface="Calibri" pitchFamily="34" charset="-120"/>
+              </a:rPr>
+              <a:t>PC — fails CIS 5.2.9, SSH root login is enabled.</a:t>
+            </a:r>
+            <a:endParaRPr lang="en-US" sz="1200" dirty="0"/>
+          </a:p>
+          <a:p>
+            <a:pPr marL="342900" indent="-342900">
+              <a:lnSpc>
+                <a:spcPts val="1600"/>
+              </a:lnSpc>
+              <a:spcAft>
+                <a:spcPts val="600"/>
+              </a:spcAft>
+              <a:buSzPct val="100000"/>
+              <a:buChar char="•"/>
+            </a:pPr>
+            <a:r>
+              <a:rPr lang="en-US" sz="1200" dirty="0">
+                <a:solidFill>
+                  <a:srgbClr val="A3ADC0"/>
+                </a:solidFill>
+                <a:latin typeface="Calibri" pitchFamily="34" charset="0"/>
+                <a:ea typeface="Calibri" pitchFamily="34" charset="-122"/>
+                <a:cs typeface="Calibri" pitchFamily="34" charset="-120"/>
+              </a:rPr>
+              <a:t>CA — agent healthy, so this score can be trusted.</a:t>
+            </a:r>
+            <a:endParaRPr lang="en-US" sz="1200" dirty="0"/>
+          </a:p>
+          <a:p>
+            <a:pPr marL="342900" indent="-342900">
+              <a:lnSpc>
+                <a:spcPts val="1600"/>
+              </a:lnSpc>
+              <a:spcAft>
+                <a:spcPts val="600"/>
+              </a:spcAft>
+              <a:buSzPct val="100000"/>
+              <a:buChar char="•"/>
+            </a:pPr>
+            <a:r>
+              <a:rPr lang="en-US" sz="1200" dirty="0">
+                <a:solidFill>
+                  <a:srgbClr val="A3ADC0"/>
+                </a:solidFill>
+                <a:latin typeface="Calibri" pitchFamily="34" charset="0"/>
+                <a:ea typeface="Calibri" pitchFamily="34" charset="-122"/>
+                <a:cs typeface="Calibri" pitchFamily="34" charset="-120"/>
+              </a:rPr>
+              <a:t>PM — a remediation job exists and has not run. Expedite it.</a:t>
             </a:r>
             <a:endParaRPr lang="en-US" sz="1200" dirty="0"/>
           </a:p>
@@ -5132,7 +6960,7 @@
                 <a:ea typeface="Courier New" pitchFamily="34" charset="-122"/>
                 <a:cs typeface="Courier New" pitchFamily="34" charset="-120"/>
               </a:rPr>
-              <a:t>14 / 16</a:t>
+              <a:t>14 / 17</a:t>
             </a:r>
             <a:endParaRPr lang="en-US" sz="900" dirty="0"/>
           </a:p>
@@ -5242,7 +7070,7 @@
                 <a:ea typeface="Arial" pitchFamily="34" charset="-122"/>
                 <a:cs typeface="Arial" pitchFamily="34" charset="-120"/>
               </a:rPr>
-              <a:t>The same product, re-scoped</a:t>
+              <a:t>The audit log proves the negative</a:t>
             </a:r>
             <a:endParaRPr lang="en-US" sz="2700" dirty="0"/>
           </a:p>
@@ -5250,7 +7078,7 @@
       </p:sp>
       <p:pic>
         <p:nvPicPr>
-          <p:cNvPr id="4" name="Image 0" descr="deck_img/E_manager_full.jpg">    </p:cNvPr>
+          <p:cNvPr id="4" name="Image 0" descr="deck_img/D_analyst_audit.jpg">    </p:cNvPr>
           <p:cNvPicPr>
             <a:picLocks noChangeAspect="1"/>
           </p:cNvPicPr>
@@ -5337,7 +7165,7 @@
                 <a:ea typeface="Calibri" pitchFamily="34" charset="-122"/>
                 <a:cs typeface="Calibri" pitchFamily="34" charset="-120"/>
               </a:rPr>
-              <a:t>Manager profile: PC, TC, CS and PM are locked. 3 of 8 modules in scope.</a:t>
+              <a:t>Append-only JSONL: timestamp, tool, module, actor, mode, result. Written for every call — including the ones that were denied.</a:t>
             </a:r>
             <a:endParaRPr lang="en-US" sz="1250" dirty="0"/>
           </a:p>
@@ -5383,7 +7211,7 @@
                 <a:ea typeface="Calibri" pitchFamily="34" charset="-122"/>
                 <a:cs typeface="Calibri" pitchFamily="34" charset="-120"/>
               </a:rPr>
-              <a:t>The evidence card does not silently drop what it cannot show — it says “2 modules hidden under the manager allowlist (PC, CA)”.</a:t>
+              <a:t>Most audit logs record what happened. This one lets you prove what didn't.</a:t>
             </a:r>
             <a:endParaRPr lang="en-US" sz="1200" dirty="0"/>
           </a:p>
@@ -5407,7 +7235,31 @@
                 <a:ea typeface="Calibri" pitchFamily="34" charset="-122"/>
                 <a:cs typeface="Calibri" pitchFamily="34" charset="-120"/>
               </a:rPr>
-              <a:t>The guardrail is the product surface. That is the difference between a restriction and a bug.</a:t>
+              <a:t>The Manager's trail is visibly shorter than the Analyst's — evidence that the session never touched PC, TC, CS, PM or CA, without taking anyone's word for it.</a:t>
+            </a:r>
+            <a:endParaRPr lang="en-US" sz="1200" dirty="0"/>
+          </a:p>
+          <a:p>
+            <a:pPr marL="342900" indent="-342900">
+              <a:lnSpc>
+                <a:spcPts val="1600"/>
+              </a:lnSpc>
+              <a:spcAft>
+                <a:spcPts val="600"/>
+              </a:spcAft>
+              <a:buSzPct val="100000"/>
+              <a:buChar char="•"/>
+            </a:pPr>
+            <a:r>
+              <a:rPr lang="en-US" sz="1200" dirty="0">
+                <a:solidFill>
+                  <a:srgbClr val="A3ADC0"/>
+                </a:solidFill>
+                <a:latin typeface="Calibri" pitchFamily="34" charset="0"/>
+                <a:ea typeface="Calibri" pitchFamily="34" charset="-122"/>
+                <a:cs typeface="Calibri" pitchFamily="34" charset="-120"/>
+              </a:rPr>
+              <a:t>That is the difference between compliance theatre and a control.</a:t>
             </a:r>
             <a:endParaRPr lang="en-US" sz="1200" dirty="0"/>
           </a:p>
@@ -5446,7 +7298,7 @@
                 <a:ea typeface="Courier New" pitchFamily="34" charset="-122"/>
                 <a:cs typeface="Courier New" pitchFamily="34" charset="-120"/>
               </a:rPr>
-              <a:t>15 / 16</a:t>
+              <a:t>15 / 17</a:t>
             </a:r>
             <a:endParaRPr lang="en-US" sz="900" dirty="0"/>
           </a:p>
@@ -5486,6 +7338,344 @@
       </p:grpSpPr>
       <p:sp>
         <p:nvSpPr>
+          <p:cNvPr id="2" name="Text 0"/>
+          <p:cNvSpPr/>
+          <p:nvPr/>
+        </p:nvSpPr>
+        <p:spPr>
+          <a:xfrm>
+            <a:off x="566928" y="365760"/>
+            <a:ext cx="11055096" cy="219456"/>
+          </a:xfrm>
+          <a:prstGeom prst="rect">
+            <a:avLst/>
+          </a:prstGeom>
+          <a:noFill/>
+          <a:ln/>
+        </p:spPr>
+        <p:txBody>
+          <a:bodyPr wrap="square" lIns="0" tIns="0" rIns="0" bIns="0" rtlCol="0" anchor="ctr"/>
+          <a:lstStyle/>
+          <a:p>
+            <a:pPr indent="0" marL="0">
+              <a:buNone/>
+            </a:pPr>
+            <a:r>
+              <a:rPr lang="en-US" sz="1000" b="1" spc="200" kern="0" dirty="0">
+                <a:solidFill>
+                  <a:srgbClr val="3FC9BD"/>
+                </a:solidFill>
+                <a:latin typeface="Courier New" pitchFamily="34" charset="0"/>
+                <a:ea typeface="Courier New" pitchFamily="34" charset="-122"/>
+                <a:cs typeface="Courier New" pitchFamily="34" charset="-120"/>
+              </a:rPr>
+              <a:t>THE SURFACE</a:t>
+            </a:r>
+            <a:endParaRPr lang="en-US" sz="1000" dirty="0"/>
+          </a:p>
+        </p:txBody>
+      </p:sp>
+      <p:sp>
+        <p:nvSpPr>
+          <p:cNvPr id="3" name="Text 1"/>
+          <p:cNvSpPr/>
+          <p:nvPr/>
+        </p:nvSpPr>
+        <p:spPr>
+          <a:xfrm>
+            <a:off x="566928" y="621792"/>
+            <a:ext cx="11055096" cy="548640"/>
+          </a:xfrm>
+          <a:prstGeom prst="rect">
+            <a:avLst/>
+          </a:prstGeom>
+          <a:noFill/>
+          <a:ln/>
+        </p:spPr>
+        <p:txBody>
+          <a:bodyPr wrap="square" lIns="0" tIns="0" rIns="0" bIns="0" rtlCol="0" anchor="t"/>
+          <a:lstStyle/>
+          <a:p>
+            <a:pPr indent="0" marL="0">
+              <a:buNone/>
+            </a:pPr>
+            <a:r>
+              <a:rPr lang="en-US" sz="2700" b="1" dirty="0">
+                <a:solidFill>
+                  <a:srgbClr val="E7ECF3"/>
+                </a:solidFill>
+                <a:latin typeface="Arial" pitchFamily="34" charset="0"/>
+                <a:ea typeface="Arial" pitchFamily="34" charset="-122"/>
+                <a:cs typeface="Arial" pitchFamily="34" charset="-120"/>
+              </a:rPr>
+              <a:t>The same product, re-scoped</a:t>
+            </a:r>
+            <a:endParaRPr lang="en-US" sz="2700" dirty="0"/>
+          </a:p>
+        </p:txBody>
+      </p:sp>
+      <p:pic>
+        <p:nvPicPr>
+          <p:cNvPr id="4" name="Image 0" descr="deck_img/E_manager_evidence_2of5.jpg">    </p:cNvPr>
+          <p:cNvPicPr>
+            <a:picLocks noChangeAspect="1"/>
+          </p:cNvPicPr>
+          <p:nvPr/>
+        </p:nvPicPr>
+        <p:blipFill>
+          <a:blip r:embed="rId1"/>
+          <a:stretch>
+            <a:fillRect/>
+          </a:stretch>
+        </p:blipFill>
+        <p:spPr>
+          <a:xfrm>
+            <a:off x="3134814" y="1298448"/>
+            <a:ext cx="5919324" cy="3520440"/>
+          </a:xfrm>
+          <a:prstGeom prst="rect">
+            <a:avLst/>
+          </a:prstGeom>
+        </p:spPr>
+      </p:pic>
+      <p:sp>
+        <p:nvSpPr>
+          <p:cNvPr id="5" name="Shape 2"/>
+          <p:cNvSpPr/>
+          <p:nvPr/>
+        </p:nvSpPr>
+        <p:spPr>
+          <a:xfrm>
+            <a:off x="566928" y="5093208"/>
+            <a:ext cx="3931920" cy="1261872"/>
+          </a:xfrm>
+          <a:prstGeom prst="roundRect">
+            <a:avLst>
+              <a:gd name="adj" fmla="val 4348"/>
+            </a:avLst>
+          </a:prstGeom>
+          <a:solidFill>
+            <a:srgbClr val="3FC9BD">
+              <a:alpha val="12000"/>
+            </a:srgbClr>
+          </a:solidFill>
+          <a:ln w="12700">
+            <a:solidFill>
+              <a:srgbClr val="3FC9BD"/>
+            </a:solidFill>
+            <a:prstDash val="solid"/>
+          </a:ln>
+        </p:spPr>
+      </p:sp>
+      <p:sp>
+        <p:nvSpPr>
+          <p:cNvPr id="6" name="Text 3"/>
+          <p:cNvSpPr/>
+          <p:nvPr/>
+        </p:nvSpPr>
+        <p:spPr>
+          <a:xfrm>
+            <a:off x="768096" y="5093208"/>
+            <a:ext cx="3529584" cy="1261872"/>
+          </a:xfrm>
+          <a:prstGeom prst="rect">
+            <a:avLst/>
+          </a:prstGeom>
+          <a:noFill/>
+          <a:ln/>
+        </p:spPr>
+        <p:txBody>
+          <a:bodyPr wrap="square" lIns="0" tIns="0" rIns="0" bIns="0" rtlCol="0" anchor="ctr"/>
+          <a:lstStyle/>
+          <a:p>
+            <a:pPr indent="0" marL="0">
+              <a:lnSpc>
+                <a:spcPts val="1700"/>
+              </a:lnSpc>
+              <a:buNone/>
+            </a:pPr>
+            <a:r>
+              <a:rPr lang="en-US" sz="1250" b="1" dirty="0">
+                <a:solidFill>
+                  <a:srgbClr val="E7ECF3"/>
+                </a:solidFill>
+                <a:latin typeface="Calibri" pitchFamily="34" charset="0"/>
+                <a:ea typeface="Calibri" pitchFamily="34" charset="-122"/>
+                <a:cs typeface="Calibri" pitchFamily="34" charset="-120"/>
+              </a:rPr>
+              <a:t>Manager profile, same asset, same endpoint: 2 of 5 evidence cards render. The server decides, not the stylesheet.</a:t>
+            </a:r>
+            <a:endParaRPr lang="en-US" sz="1250" dirty="0"/>
+          </a:p>
+        </p:txBody>
+      </p:sp>
+      <p:sp>
+        <p:nvSpPr>
+          <p:cNvPr id="7" name="Text 4"/>
+          <p:cNvSpPr/>
+          <p:nvPr/>
+        </p:nvSpPr>
+        <p:spPr>
+          <a:xfrm>
+            <a:off x="4791456" y="5093208"/>
+            <a:ext cx="6830568" cy="1261872"/>
+          </a:xfrm>
+          <a:prstGeom prst="rect">
+            <a:avLst/>
+          </a:prstGeom>
+          <a:noFill/>
+          <a:ln/>
+        </p:spPr>
+        <p:txBody>
+          <a:bodyPr wrap="square" lIns="0" tIns="0" rIns="0" bIns="0" rtlCol="0" anchor="ctr"/>
+          <a:lstStyle/>
+          <a:p>
+            <a:pPr marL="342900" indent="-342900">
+              <a:lnSpc>
+                <a:spcPts val="1600"/>
+              </a:lnSpc>
+              <a:spcAft>
+                <a:spcPts val="600"/>
+              </a:spcAft>
+              <a:buSzPct val="100000"/>
+              <a:buChar char="•"/>
+            </a:pPr>
+            <a:r>
+              <a:rPr lang="en-US" sz="1200" dirty="0">
+                <a:solidFill>
+                  <a:srgbClr val="A3ADC0"/>
+                </a:solidFill>
+                <a:latin typeface="Calibri" pitchFamily="34" charset="0"/>
+                <a:ea typeface="Calibri" pitchFamily="34" charset="-122"/>
+                <a:cs typeface="Calibri" pitchFamily="34" charset="-120"/>
+              </a:rPr>
+              <a:t>The banner names exactly what hid: “3 modules hidden under the manager allowlist (PC, CA, PM).” Nothing is silently dropped.</a:t>
+            </a:r>
+            <a:endParaRPr lang="en-US" sz="1200" dirty="0"/>
+          </a:p>
+          <a:p>
+            <a:pPr marL="342900" indent="-342900">
+              <a:lnSpc>
+                <a:spcPts val="1600"/>
+              </a:lnSpc>
+              <a:spcAft>
+                <a:spcPts val="600"/>
+              </a:spcAft>
+              <a:buSzPct val="100000"/>
+              <a:buChar char="•"/>
+            </a:pPr>
+            <a:r>
+              <a:rPr lang="en-US" sz="1200" dirty="0">
+                <a:solidFill>
+                  <a:srgbClr val="A3ADC0"/>
+                </a:solidFill>
+                <a:latin typeface="Calibri" pitchFamily="34" charset="0"/>
+                <a:ea typeface="Calibri" pitchFamily="34" charset="-122"/>
+                <a:cs typeface="Calibri" pitchFamily="34" charset="-120"/>
+              </a:rPr>
+              <a:t>Ask about patches anyway and the copilot says PM is out of scope — the restriction surfaces in the conversation, not in a log the manager will never read.</a:t>
+            </a:r>
+            <a:endParaRPr lang="en-US" sz="1200" dirty="0"/>
+          </a:p>
+          <a:p>
+            <a:pPr marL="342900" indent="-342900">
+              <a:lnSpc>
+                <a:spcPts val="1600"/>
+              </a:lnSpc>
+              <a:spcAft>
+                <a:spcPts val="600"/>
+              </a:spcAft>
+              <a:buSzPct val="100000"/>
+              <a:buChar char="•"/>
+            </a:pPr>
+            <a:r>
+              <a:rPr lang="en-US" sz="1200" dirty="0">
+                <a:solidFill>
+                  <a:srgbClr val="A3ADC0"/>
+                </a:solidFill>
+                <a:latin typeface="Calibri" pitchFamily="34" charset="0"/>
+                <a:ea typeface="Calibri" pitchFamily="34" charset="-122"/>
+                <a:cs typeface="Calibri" pitchFamily="34" charset="-120"/>
+              </a:rPr>
+              <a:t>Restriction is a designed state, not an error state.</a:t>
+            </a:r>
+            <a:endParaRPr lang="en-US" sz="1200" dirty="0"/>
+          </a:p>
+        </p:txBody>
+      </p:sp>
+      <p:sp>
+        <p:nvSpPr>
+          <p:cNvPr id="8" name="Text 5"/>
+          <p:cNvSpPr/>
+          <p:nvPr/>
+        </p:nvSpPr>
+        <p:spPr>
+          <a:xfrm>
+            <a:off x="10817352" y="6355080"/>
+            <a:ext cx="822960" cy="274320"/>
+          </a:xfrm>
+          <a:prstGeom prst="rect">
+            <a:avLst/>
+          </a:prstGeom>
+          <a:noFill/>
+          <a:ln/>
+        </p:spPr>
+        <p:txBody>
+          <a:bodyPr wrap="square" lIns="0" tIns="0" rIns="0" bIns="0" rtlCol="0" anchor="ctr"/>
+          <a:lstStyle/>
+          <a:p>
+            <a:pPr algn="r" indent="0" marL="0">
+              <a:buNone/>
+            </a:pPr>
+            <a:r>
+              <a:rPr lang="en-US" sz="900" dirty="0">
+                <a:solidFill>
+                  <a:srgbClr val="3B4453"/>
+                </a:solidFill>
+                <a:latin typeface="Courier New" pitchFamily="34" charset="0"/>
+                <a:ea typeface="Courier New" pitchFamily="34" charset="-122"/>
+                <a:cs typeface="Courier New" pitchFamily="34" charset="-120"/>
+              </a:rPr>
+              <a:t>16 / 17</a:t>
+            </a:r>
+            <a:endParaRPr lang="en-US" sz="900" dirty="0"/>
+          </a:p>
+        </p:txBody>
+      </p:sp>
+    </p:spTree>
+  </p:cSld>
+  <p:clrMapOvr>
+    <a:masterClrMapping/>
+  </p:clrMapOvr>
+</p:sld>
+</file>
+
+<file path=ppt/slides/slide17.xml><?xml version="1.0" encoding="utf-8"?>
+<p:sld xmlns:a="http://schemas.openxmlformats.org/drawingml/2006/main" xmlns:r="http://schemas.openxmlformats.org/officeDocument/2006/relationships" xmlns:p="http://schemas.openxmlformats.org/presentationml/2006/main">
+  <p:cSld name="Slide 17">
+    <p:bg>
+      <p:bgPr>
+        <a:solidFill>
+          <a:srgbClr val="0A0D13"/>
+        </a:solidFill>
+      </p:bgPr>
+    </p:bg>
+    <p:spTree>
+      <p:nvGrpSpPr>
+        <p:cNvPr id="1" name=""/>
+        <p:cNvGrpSpPr/>
+        <p:nvPr/>
+      </p:nvGrpSpPr>
+      <p:grpSpPr>
+        <a:xfrm>
+          <a:off x="0" y="0"/>
+          <a:ext cx="0" cy="0"/>
+          <a:chOff x="0" y="0"/>
+          <a:chExt cx="0" cy="0"/>
+        </a:xfrm>
+      </p:grpSpPr>
+      <p:sp>
+        <p:nvSpPr>
           <p:cNvPr id="2" name="Shape 0"/>
           <p:cNvSpPr/>
           <p:nvPr/>
@@ -5975,7 +8165,7 @@
                 <a:ea typeface="Courier New" pitchFamily="34" charset="-122"/>
                 <a:cs typeface="Courier New" pitchFamily="34" charset="-120"/>
               </a:rPr>
-              <a:t>16 / 16</a:t>
+              <a:t>17 / 17</a:t>
             </a:r>
             <a:endParaRPr lang="en-US" sz="900" dirty="0"/>
           </a:p>
@@ -6376,7 +8566,7 @@
                 <a:ea typeface="Calibri" pitchFamily="34" charset="-122"/>
                 <a:cs typeface="Calibri" pitchFamily="34" charset="-120"/>
               </a:rPr>
-              <a:t>OUTCOME  ·  a ranked, defensible, auditable weekly risk answer</a:t>
+              <a:t>OUTCOME  ·  a running, governed, auditable risk copilot</a:t>
             </a:r>
             <a:endParaRPr lang="en-US" sz="1250" dirty="0"/>
           </a:p>
@@ -6415,7 +8605,7 @@
                 <a:ea typeface="Courier New" pitchFamily="34" charset="-122"/>
                 <a:cs typeface="Courier New" pitchFamily="34" charset="-120"/>
               </a:rPr>
-              <a:t>02 / 16</a:t>
+              <a:t>02 / 17</a:t>
             </a:r>
             <a:endParaRPr lang="en-US" sz="900" dirty="0"/>
           </a:p>
@@ -7155,7 +9345,7 @@
                 <a:ea typeface="Courier New" pitchFamily="34" charset="-122"/>
                 <a:cs typeface="Courier New" pitchFamily="34" charset="-120"/>
               </a:rPr>
-              <a:t>03 / 16</a:t>
+              <a:t>03 / 17</a:t>
             </a:r>
             <a:endParaRPr lang="en-US" sz="900" dirty="0"/>
           </a:p>
@@ -7754,7 +9944,7 @@
                 <a:ea typeface="Courier New" pitchFamily="34" charset="-122"/>
                 <a:cs typeface="Courier New" pitchFamily="34" charset="-120"/>
               </a:rPr>
-              <a:t>04 / 16</a:t>
+              <a:t>04 / 17</a:t>
             </a:r>
             <a:endParaRPr lang="en-US" sz="900" dirty="0"/>
           </a:p>
@@ -8558,7 +10748,7 @@
                 <a:ea typeface="Courier New" pitchFamily="34" charset="-122"/>
                 <a:cs typeface="Courier New" pitchFamily="34" charset="-120"/>
               </a:rPr>
-              <a:t>05 / 16</a:t>
+              <a:t>05 / 17</a:t>
             </a:r>
             <a:endParaRPr lang="en-US" sz="900" dirty="0"/>
           </a:p>
@@ -10873,7 +13063,7 @@
                 <a:ea typeface="Courier New" pitchFamily="34" charset="-122"/>
                 <a:cs typeface="Courier New" pitchFamily="34" charset="-120"/>
               </a:rPr>
-              <a:t>06 / 16</a:t>
+              <a:t>06 / 17</a:t>
             </a:r>
             <a:endParaRPr lang="en-US" sz="900" dirty="0"/>
           </a:p>
@@ -11622,7 +13812,7 @@
                 <a:ea typeface="Courier New" pitchFamily="34" charset="-122"/>
                 <a:cs typeface="Courier New" pitchFamily="34" charset="-120"/>
               </a:rPr>
-              <a:t>07 / 16</a:t>
+              <a:t>07 / 17</a:t>
             </a:r>
             <a:endParaRPr lang="en-US" sz="900" dirty="0"/>
           </a:p>
@@ -14107,7 +16297,7 @@
                 <a:ea typeface="Courier New" pitchFamily="34" charset="-122"/>
                 <a:cs typeface="Courier New" pitchFamily="34" charset="-120"/>
               </a:rPr>
-              <a:t>08 / 16</a:t>
+              <a:t>08 / 17</a:t>
             </a:r>
             <a:endParaRPr lang="en-US" sz="900" dirty="0"/>
           </a:p>
@@ -15162,7 +17352,7 @@
                 <a:ea typeface="Courier New" pitchFamily="34" charset="-122"/>
                 <a:cs typeface="Courier New" pitchFamily="34" charset="-120"/>
               </a:rPr>
-              <a:t>09 / 16</a:t>
+              <a:t>09 / 17</a:t>
             </a:r>
             <a:endParaRPr lang="en-US" sz="900" dirty="0"/>
           </a:p>
